--- a/retrieval-retrieval-placemat-template.pptx
+++ b/retrieval-retrieval-placemat-template.pptx
@@ -2,13 +2,13 @@
 <file path=ppt/presentation.xml><?xml version="1.0" encoding="utf-8"?>
 <p:presentation xmlns:p="http://schemas.openxmlformats.org/presentationml/2006/main">
   <p:sldMasterIdLst>
-    <p:sldMasterId xmlns:r="http://schemas.openxmlformats.org/officeDocument/2006/relationships" id="2147483648" r:id="Rc47dc020a5874c23"/>
+    <p:sldMasterId xmlns:r="http://schemas.openxmlformats.org/officeDocument/2006/relationships" id="2147483648" r:id="Rfcccc3965b2248ad"/>
   </p:sldMasterIdLst>
   <p:notesMasterIdLst>
-    <p:notesMasterId xmlns:r="http://schemas.openxmlformats.org/officeDocument/2006/relationships" r:id="R569ef866824a4006"/>
+    <p:notesMasterId xmlns:r="http://schemas.openxmlformats.org/officeDocument/2006/relationships" r:id="R7cfbf09cf5684918"/>
   </p:notesMasterIdLst>
   <p:sldIdLst>
-    <p:sldId xmlns:r="http://schemas.openxmlformats.org/officeDocument/2006/relationships" id="256" r:id="R961583bc8ad74ab1"/>
+    <p:sldId xmlns:r="http://schemas.openxmlformats.org/officeDocument/2006/relationships" id="256" r:id="R0eb522b93fd941c6"/>
   </p:sldIdLst>
   <p:sldSz cx="12192000" cy="6858000"/>
   <p:notesSz cx="6858000" cy="9144000"/>
@@ -442,62 +442,7 @@
           <a:lstStyle xmlns:a="http://schemas.openxmlformats.org/drawingml/2006/main"/>
           <a:p xmlns:a="http://schemas.openxmlformats.org/drawingml/2006/main">
             <a:r>
-              <a:t>Teacher setup: Replace bracketed text before teaching. All text and shapes are editable. Duplicate the slide for answers or another prompt. For card activities, separate prompt and answer sides before printing.</a:t>
-            </a:r>
-          </a:p>
-          <a:p xmlns:a="http://schemas.openxmlformats.org/drawingml/2006/main">
-            <a:r>
-              <a:t/>
-            </a:r>
-          </a:p>
-          <a:p xmlns:a="http://schemas.openxmlformats.org/drawingml/2006/main">
-            <a:r>
-              <a:t>Materials: Paper divided into individual spaces and a centre</a:t>
-            </a:r>
-          </a:p>
-          <a:p xmlns:a="http://schemas.openxmlformats.org/drawingml/2006/main">
-            <a:r>
-              <a:t>Suggested time including feedback: 10 minutes.</a:t>
-            </a:r>
-          </a:p>
-          <a:p xmlns:a="http://schemas.openxmlformats.org/drawingml/2006/main">
-            <a:r>
-              <a:t/>
-            </a:r>
-          </a:p>
-          <a:p xmlns:a="http://schemas.openxmlformats.org/drawingml/2006/main">
-            <a:r>
-              <a:t>1. Divide the page: Allocate a separate writing area to every group member.</a:t>
-            </a:r>
-          </a:p>
-          <a:p xmlns:a="http://schemas.openxmlformats.org/drawingml/2006/main">
-            <a:r>
-              <a:t>2. Recall alone: Everyone writes independently without notes or discussion.</a:t>
-            </a:r>
-          </a:p>
-          <a:p xmlns:a="http://schemas.openxmlformats.org/drawingml/2006/main">
-            <a:r>
-              <a:t>3. Compare ideas: Take turns explaining recall, and put agreed ideas in the centre.</a:t>
-            </a:r>
-          </a:p>
-          <a:p xmlns:a="http://schemas.openxmlformats.org/drawingml/2006/main">
-            <a:r>
-              <a:t>4. Check and retry: Verify the shared response; each learner recalls a corrected idea alone.</a:t>
-            </a:r>
-          </a:p>
-          <a:p xmlns:a="http://schemas.openxmlformats.org/drawingml/2006/main">
-            <a:r>
-              <a:t/>
-            </a:r>
-          </a:p>
-          <a:p xmlns:a="http://schemas.openxmlformats.org/drawingml/2006/main">
-            <a:r>
-              <a:t>Check: A group answer can hide individual gaps. Keep each learner’s initial response visible.</a:t>
-            </a:r>
-          </a:p>
-          <a:p xmlns:a="http://schemas.openxmlformats.org/drawingml/2006/main">
-            <a:r>
-              <a:t>Adapt: Use pairs or separate sheets if shared paper is awkward; assign speaking turns.</a:t>
+              <a:t>Replace bracketed text with your own taught prompts and checked answers. All labels and response areas are editable. Give everyone an independent attempt before revealing answers. Duplicate the slide for answers or another prompt. For cards, print the prompt and answer on opposite sides or fold them to keep answers hidden.</a:t>
             </a:r>
           </a:p>
         </p:txBody>
@@ -544,7 +489,7 @@
           <p:cNvPr id="4" name="Accent rule">
             <a:extLst xmlns:a="http://schemas.openxmlformats.org/drawingml/2006/main">
               <a:ext uri="{FF2B5EF4-FFF2-40B4-BE49-F238E27FC236}">
-                <a16:creationId xmlns:a16="http://schemas.microsoft.com/office/drawing/2014/main" id="{16C14724-E230-4E54-8467-C88512889B79}"/>
+                <a16:creationId xmlns:a16="http://schemas.microsoft.com/office/drawing/2014/main" id="{FEA5FC85-F262-46EF-B39A-26C7F070F028}"/>
               </a:ext>
             </a:extLst>
           </p:cNvPr>
@@ -575,7 +520,7 @@
           <p:cNvPr id="2" name="Title">
             <a:extLst xmlns:a="http://schemas.openxmlformats.org/drawingml/2006/main">
               <a:ext uri="{FF2B5EF4-FFF2-40B4-BE49-F238E27FC236}">
-                <a16:creationId xmlns:a16="http://schemas.microsoft.com/office/drawing/2014/main" id="{89FBD0FC-4C94-45B2-AA39-6ED995069D6B}"/>
+                <a16:creationId xmlns:a16="http://schemas.microsoft.com/office/drawing/2014/main" id="{952021B6-88A2-460A-AC6B-156FBEEEBE7A}"/>
               </a:ext>
             </a:extLst>
           </p:cNvPr>
@@ -722,7 +667,7 @@
           <p:cNvPr id="3" name="Subtitle">
             <a:extLst xmlns:a="http://schemas.openxmlformats.org/drawingml/2006/main">
               <a:ext uri="{FF2B5EF4-FFF2-40B4-BE49-F238E27FC236}">
-                <a16:creationId xmlns:a16="http://schemas.microsoft.com/office/drawing/2014/main" id="{AA7AC34D-05B7-420D-9AB4-B781FEDD40E7}"/>
+                <a16:creationId xmlns:a16="http://schemas.microsoft.com/office/drawing/2014/main" id="{005A1D9F-AD6A-4294-92E3-2F6DF2531069}"/>
               </a:ext>
             </a:extLst>
           </p:cNvPr>
@@ -886,7 +831,7 @@
           <p:cNvPr id="3" name="Accent rule">
             <a:extLst xmlns:a="http://schemas.openxmlformats.org/drawingml/2006/main">
               <a:ext uri="{FF2B5EF4-FFF2-40B4-BE49-F238E27FC236}">
-                <a16:creationId xmlns:a16="http://schemas.microsoft.com/office/drawing/2014/main" id="{A304464E-05EA-41B9-A44A-DEF279F2A412}"/>
+                <a16:creationId xmlns:a16="http://schemas.microsoft.com/office/drawing/2014/main" id="{E2B040A9-34B3-4128-AE38-A322B248E0F1}"/>
               </a:ext>
             </a:extLst>
           </p:cNvPr>
@@ -917,7 +862,7 @@
           <p:cNvPr id="2" name="Section title">
             <a:extLst xmlns:a="http://schemas.openxmlformats.org/drawingml/2006/main">
               <a:ext uri="{FF2B5EF4-FFF2-40B4-BE49-F238E27FC236}">
-                <a16:creationId xmlns:a16="http://schemas.microsoft.com/office/drawing/2014/main" id="{6F51AB4B-267D-4B55-B7AB-D700C16CB540}"/>
+                <a16:creationId xmlns:a16="http://schemas.microsoft.com/office/drawing/2014/main" id="{3EDD96EB-FDC8-4085-BB27-4A4DBC61354B}"/>
               </a:ext>
             </a:extLst>
           </p:cNvPr>
@@ -1081,7 +1026,7 @@
           <p:cNvPr id="4" name="Accent rule">
             <a:extLst xmlns:a="http://schemas.openxmlformats.org/drawingml/2006/main">
               <a:ext uri="{FF2B5EF4-FFF2-40B4-BE49-F238E27FC236}">
-                <a16:creationId xmlns:a16="http://schemas.microsoft.com/office/drawing/2014/main" id="{0027C0E2-1DE1-493E-AB34-43A79625A195}"/>
+                <a16:creationId xmlns:a16="http://schemas.microsoft.com/office/drawing/2014/main" id="{BD5FC6E4-4D32-4B0E-9434-518522878038}"/>
               </a:ext>
             </a:extLst>
           </p:cNvPr>
@@ -1112,7 +1057,7 @@
           <p:cNvPr id="2" name="Title">
             <a:extLst xmlns:a="http://schemas.openxmlformats.org/drawingml/2006/main">
               <a:ext uri="{FF2B5EF4-FFF2-40B4-BE49-F238E27FC236}">
-                <a16:creationId xmlns:a16="http://schemas.microsoft.com/office/drawing/2014/main" id="{E546BC25-2EE1-4F89-832B-FB6122E6AB19}"/>
+                <a16:creationId xmlns:a16="http://schemas.microsoft.com/office/drawing/2014/main" id="{78898268-2D42-4F51-BF9F-DBFE9FD869B3}"/>
               </a:ext>
             </a:extLst>
           </p:cNvPr>
@@ -1259,7 +1204,7 @@
           <p:cNvPr id="3" name="Body">
             <a:extLst xmlns:a="http://schemas.openxmlformats.org/drawingml/2006/main">
               <a:ext uri="{FF2B5EF4-FFF2-40B4-BE49-F238E27FC236}">
-                <a16:creationId xmlns:a16="http://schemas.microsoft.com/office/drawing/2014/main" id="{C7E4E451-5C61-4D88-A7AE-1012D1347334}"/>
+                <a16:creationId xmlns:a16="http://schemas.microsoft.com/office/drawing/2014/main" id="{54A57584-AA3D-4359-A6E5-83C1F6919A5B}"/>
               </a:ext>
             </a:extLst>
           </p:cNvPr>
@@ -1423,7 +1368,7 @@
           <p:cNvPr id="5" name="Accent rule">
             <a:extLst xmlns:a="http://schemas.openxmlformats.org/drawingml/2006/main">
               <a:ext uri="{FF2B5EF4-FFF2-40B4-BE49-F238E27FC236}">
-                <a16:creationId xmlns:a16="http://schemas.microsoft.com/office/drawing/2014/main" id="{587798E4-8ADD-434B-BCE3-4EC45AAAD718}"/>
+                <a16:creationId xmlns:a16="http://schemas.microsoft.com/office/drawing/2014/main" id="{5B989FEB-8D4B-4181-B25F-65AE84052FF3}"/>
               </a:ext>
             </a:extLst>
           </p:cNvPr>
@@ -1454,7 +1399,7 @@
           <p:cNvPr id="2" name="Title">
             <a:extLst xmlns:a="http://schemas.openxmlformats.org/drawingml/2006/main">
               <a:ext uri="{FF2B5EF4-FFF2-40B4-BE49-F238E27FC236}">
-                <a16:creationId xmlns:a16="http://schemas.microsoft.com/office/drawing/2014/main" id="{31C18B92-9E70-45AA-ADCB-75C11AE53B1C}"/>
+                <a16:creationId xmlns:a16="http://schemas.microsoft.com/office/drawing/2014/main" id="{79A6ADC2-D40A-4EB3-AA96-7C1853F309B7}"/>
               </a:ext>
             </a:extLst>
           </p:cNvPr>
@@ -1601,7 +1546,7 @@
           <p:cNvPr id="3" name="Left column">
             <a:extLst xmlns:a="http://schemas.openxmlformats.org/drawingml/2006/main">
               <a:ext uri="{FF2B5EF4-FFF2-40B4-BE49-F238E27FC236}">
-                <a16:creationId xmlns:a16="http://schemas.microsoft.com/office/drawing/2014/main" id="{D224E1C1-D6C7-4072-9E18-740BF409B421}"/>
+                <a16:creationId xmlns:a16="http://schemas.microsoft.com/office/drawing/2014/main" id="{A9C6FAE4-3AEC-40EB-A84B-B303C3C9061D}"/>
               </a:ext>
             </a:extLst>
           </p:cNvPr>
@@ -1748,7 +1693,7 @@
           <p:cNvPr id="4" name="Right column">
             <a:extLst xmlns:a="http://schemas.openxmlformats.org/drawingml/2006/main">
               <a:ext uri="{FF2B5EF4-FFF2-40B4-BE49-F238E27FC236}">
-                <a16:creationId xmlns:a16="http://schemas.microsoft.com/office/drawing/2014/main" id="{165C78D7-AFA4-4C13-B95E-BF28B3DDC359}"/>
+                <a16:creationId xmlns:a16="http://schemas.microsoft.com/office/drawing/2014/main" id="{A05A39A8-D38B-4D57-B0C0-290FE55E4C15}"/>
               </a:ext>
             </a:extLst>
           </p:cNvPr>
@@ -1912,7 +1857,7 @@
           <p:cNvPr id="4" name="Accent rule">
             <a:extLst xmlns:a="http://schemas.openxmlformats.org/drawingml/2006/main">
               <a:ext uri="{FF2B5EF4-FFF2-40B4-BE49-F238E27FC236}">
-                <a16:creationId xmlns:a16="http://schemas.microsoft.com/office/drawing/2014/main" id="{CE356C4F-FC04-42B3-821D-2C27BE5FC4DF}"/>
+                <a16:creationId xmlns:a16="http://schemas.microsoft.com/office/drawing/2014/main" id="{81F512E9-025C-444E-8D81-C4A34E324DE8}"/>
               </a:ext>
             </a:extLst>
           </p:cNvPr>
@@ -1943,7 +1888,7 @@
           <p:cNvPr id="2" name="Title">
             <a:extLst xmlns:a="http://schemas.openxmlformats.org/drawingml/2006/main">
               <a:ext uri="{FF2B5EF4-FFF2-40B4-BE49-F238E27FC236}">
-                <a16:creationId xmlns:a16="http://schemas.microsoft.com/office/drawing/2014/main" id="{FD116E65-D938-45CB-B074-B5CEC29AE845}"/>
+                <a16:creationId xmlns:a16="http://schemas.microsoft.com/office/drawing/2014/main" id="{622F2B5E-5882-4D3D-AF54-7A857D575E2E}"/>
               </a:ext>
             </a:extLst>
           </p:cNvPr>
@@ -2090,7 +2035,7 @@
           <p:cNvPr id="3" name="Left column">
             <a:extLst xmlns:a="http://schemas.openxmlformats.org/drawingml/2006/main">
               <a:ext uri="{FF2B5EF4-FFF2-40B4-BE49-F238E27FC236}">
-                <a16:creationId xmlns:a16="http://schemas.microsoft.com/office/drawing/2014/main" id="{6779B19C-7A28-479D-8B4E-6BE43511F02C}"/>
+                <a16:creationId xmlns:a16="http://schemas.microsoft.com/office/drawing/2014/main" id="{2BE40E1A-7AC9-4E47-8A5F-CA0269ED1420}"/>
               </a:ext>
             </a:extLst>
           </p:cNvPr>
@@ -2275,12 +2220,12 @@
   </p:cSld>
   <p:clrMap bg1="lt1" tx1="dk1" bg2="lt2" tx2="dk2" accent1="accent1" accent2="accent2" accent3="accent3" accent4="accent4" accent5="accent5" accent6="accent6" hlink="hlink" folHlink="folHlink"/>
   <p:sldLayoutIdLst>
-    <p:sldLayoutId xmlns:r="http://schemas.openxmlformats.org/officeDocument/2006/relationships" id="2147483649" r:id="R97777f43961a439f"/>
-    <p:sldLayoutId xmlns:r="http://schemas.openxmlformats.org/officeDocument/2006/relationships" id="2147483650" r:id="Rffa43a81558a42c2"/>
-    <p:sldLayoutId xmlns:r="http://schemas.openxmlformats.org/officeDocument/2006/relationships" id="2147483651" r:id="R4b209c8609074275"/>
-    <p:sldLayoutId xmlns:r="http://schemas.openxmlformats.org/officeDocument/2006/relationships" id="2147483652" r:id="R94dca4e8d0a34364"/>
-    <p:sldLayoutId xmlns:r="http://schemas.openxmlformats.org/officeDocument/2006/relationships" id="2147483653" r:id="Re93bd530c83d4f8d"/>
-    <p:sldLayoutId xmlns:r="http://schemas.openxmlformats.org/officeDocument/2006/relationships" id="2147483654" r:id="R6f95ac3a732f4ab5"/>
+    <p:sldLayoutId xmlns:r="http://schemas.openxmlformats.org/officeDocument/2006/relationships" id="2147483649" r:id="R0f9da46346c04406"/>
+    <p:sldLayoutId xmlns:r="http://schemas.openxmlformats.org/officeDocument/2006/relationships" id="2147483650" r:id="R98c464f3b8ef49ff"/>
+    <p:sldLayoutId xmlns:r="http://schemas.openxmlformats.org/officeDocument/2006/relationships" id="2147483651" r:id="R53637a7d63db441e"/>
+    <p:sldLayoutId xmlns:r="http://schemas.openxmlformats.org/officeDocument/2006/relationships" id="2147483652" r:id="Rcdaad14665804cbb"/>
+    <p:sldLayoutId xmlns:r="http://schemas.openxmlformats.org/officeDocument/2006/relationships" id="2147483653" r:id="R775da41654354bd2"/>
+    <p:sldLayoutId xmlns:r="http://schemas.openxmlformats.org/officeDocument/2006/relationships" id="2147483654" r:id="Rcf3b36af51df48dc"/>
   </p:sldLayoutIdLst>
   <p:txStyles>
     <p:titleStyle>
@@ -2831,7 +2776,7 @@
           <p:cNvPr id="31" name="">
             <a:extLst xmlns:a="http://schemas.openxmlformats.org/drawingml/2006/main">
               <a:ext uri="{FF2B5EF4-FFF2-40B4-BE49-F238E27FC236}">
-                <a16:creationId xmlns:a16="http://schemas.microsoft.com/office/drawing/2014/main" id="{22FBC52F-70DA-4159-81E4-5AAC74CB7E47}"/>
+                <a16:creationId xmlns:a16="http://schemas.microsoft.com/office/drawing/2014/main" id="{67909537-E670-4291-B71C-365C8425FAF2}"/>
               </a:ext>
             </a:extLst>
           </p:cNvPr>
@@ -2888,7 +2833,7 @@
           <p:cNvPr id="2" name="">
             <a:extLst xmlns:a="http://schemas.openxmlformats.org/drawingml/2006/main">
               <a:ext uri="{FF2B5EF4-FFF2-40B4-BE49-F238E27FC236}">
-                <a16:creationId xmlns:a16="http://schemas.microsoft.com/office/drawing/2014/main" id="{14F9316A-4378-4228-B869-0DCDE8D92C07}"/>
+                <a16:creationId xmlns:a16="http://schemas.microsoft.com/office/drawing/2014/main" id="{2A931361-1ED0-4A34-9DCF-ED725B789C2C}"/>
               </a:ext>
             </a:extLst>
           </p:cNvPr>
@@ -2945,7 +2890,7 @@
           <p:cNvPr id="3" name="">
             <a:extLst xmlns:a="http://schemas.openxmlformats.org/drawingml/2006/main">
               <a:ext uri="{FF2B5EF4-FFF2-40B4-BE49-F238E27FC236}">
-                <a16:creationId xmlns:a16="http://schemas.microsoft.com/office/drawing/2014/main" id="{5507410B-040B-435E-8BE6-97D54BE734BF}"/>
+                <a16:creationId xmlns:a16="http://schemas.microsoft.com/office/drawing/2014/main" id="{8736338E-9358-4777-B1F5-645B7BA59786}"/>
               </a:ext>
             </a:extLst>
           </p:cNvPr>
@@ -2975,7 +2920,7 @@
           <p:cNvPr id="4" name="">
             <a:extLst xmlns:a="http://schemas.openxmlformats.org/drawingml/2006/main">
               <a:ext uri="{FF2B5EF4-FFF2-40B4-BE49-F238E27FC236}">
-                <a16:creationId xmlns:a16="http://schemas.microsoft.com/office/drawing/2014/main" id="{6536BAFF-89E9-441F-B433-A8BD35BC0096}"/>
+                <a16:creationId xmlns:a16="http://schemas.microsoft.com/office/drawing/2014/main" id="{AAF0BC9A-BF1E-445B-AD86-C44858BD049D}"/>
               </a:ext>
             </a:extLst>
           </p:cNvPr>
@@ -3032,7 +2977,7 @@
           <p:cNvPr id="5" name="">
             <a:extLst xmlns:a="http://schemas.openxmlformats.org/drawingml/2006/main">
               <a:ext uri="{FF2B5EF4-FFF2-40B4-BE49-F238E27FC236}">
-                <a16:creationId xmlns:a16="http://schemas.microsoft.com/office/drawing/2014/main" id="{593F1D05-DA85-47F3-BD3B-73367E061286}"/>
+                <a16:creationId xmlns:a16="http://schemas.microsoft.com/office/drawing/2014/main" id="{5D7C6191-7167-4882-AB9D-B0BE29A610F0}"/>
               </a:ext>
             </a:extLst>
           </p:cNvPr>
@@ -3089,7 +3034,7 @@
           <p:cNvPr id="6" name="">
             <a:extLst xmlns:a="http://schemas.openxmlformats.org/drawingml/2006/main">
               <a:ext uri="{FF2B5EF4-FFF2-40B4-BE49-F238E27FC236}">
-                <a16:creationId xmlns:a16="http://schemas.microsoft.com/office/drawing/2014/main" id="{4509D5E3-AB9F-4E0D-A6C0-EA6D80D9AAC8}"/>
+                <a16:creationId xmlns:a16="http://schemas.microsoft.com/office/drawing/2014/main" id="{2C6B341C-BA91-4940-9157-1D667ABA956E}"/>
               </a:ext>
             </a:extLst>
           </p:cNvPr>
@@ -3121,7 +3066,7 @@
           <p:cNvPr id="7" name="">
             <a:extLst xmlns:a="http://schemas.openxmlformats.org/drawingml/2006/main">
               <a:ext uri="{FF2B5EF4-FFF2-40B4-BE49-F238E27FC236}">
-                <a16:creationId xmlns:a16="http://schemas.microsoft.com/office/drawing/2014/main" id="{34A22D35-B4BF-4ECB-B1DF-0FBA2FE5186D}"/>
+                <a16:creationId xmlns:a16="http://schemas.microsoft.com/office/drawing/2014/main" id="{8A65C7EB-05D1-416C-A5FC-81F39BEAD667}"/>
               </a:ext>
             </a:extLst>
           </p:cNvPr>
@@ -3151,7 +3096,7 @@
           <p:cNvPr id="8" name="">
             <a:extLst xmlns:a="http://schemas.openxmlformats.org/drawingml/2006/main">
               <a:ext uri="{FF2B5EF4-FFF2-40B4-BE49-F238E27FC236}">
-                <a16:creationId xmlns:a16="http://schemas.microsoft.com/office/drawing/2014/main" id="{A801FF92-9E8C-423E-8586-32B519277EA0}"/>
+                <a16:creationId xmlns:a16="http://schemas.microsoft.com/office/drawing/2014/main" id="{676E1AB8-D365-4461-A881-0A584756C9F7}"/>
               </a:ext>
             </a:extLst>
           </p:cNvPr>
@@ -3208,7 +3153,7 @@
           <p:cNvPr id="9" name="">
             <a:extLst xmlns:a="http://schemas.openxmlformats.org/drawingml/2006/main">
               <a:ext uri="{FF2B5EF4-FFF2-40B4-BE49-F238E27FC236}">
-                <a16:creationId xmlns:a16="http://schemas.microsoft.com/office/drawing/2014/main" id="{020803D9-3588-4977-A501-834D628DBD2B}"/>
+                <a16:creationId xmlns:a16="http://schemas.microsoft.com/office/drawing/2014/main" id="{00F0BCFB-08C6-4429-8D75-BA082B9BF4E9}"/>
               </a:ext>
             </a:extLst>
           </p:cNvPr>
@@ -3265,7 +3210,7 @@
           <p:cNvPr id="10" name="">
             <a:extLst xmlns:a="http://schemas.openxmlformats.org/drawingml/2006/main">
               <a:ext uri="{FF2B5EF4-FFF2-40B4-BE49-F238E27FC236}">
-                <a16:creationId xmlns:a16="http://schemas.microsoft.com/office/drawing/2014/main" id="{2418F5DB-70BE-4589-8AB0-1C453C192D10}"/>
+                <a16:creationId xmlns:a16="http://schemas.microsoft.com/office/drawing/2014/main" id="{83F26DE1-8E16-48E5-8D86-3E2AD82EC310}"/>
               </a:ext>
             </a:extLst>
           </p:cNvPr>
@@ -3322,7 +3267,7 @@
           <p:cNvPr id="11" name="">
             <a:extLst xmlns:a="http://schemas.openxmlformats.org/drawingml/2006/main">
               <a:ext uri="{FF2B5EF4-FFF2-40B4-BE49-F238E27FC236}">
-                <a16:creationId xmlns:a16="http://schemas.microsoft.com/office/drawing/2014/main" id="{F3BB0881-FF41-4DE2-9841-F2C33E246B36}"/>
+                <a16:creationId xmlns:a16="http://schemas.microsoft.com/office/drawing/2014/main" id="{76D032AB-5D7F-46A9-8453-300A6245917B}"/>
               </a:ext>
             </a:extLst>
           </p:cNvPr>
@@ -3354,7 +3299,7 @@
           <p:cNvPr id="12" name="">
             <a:extLst xmlns:a="http://schemas.openxmlformats.org/drawingml/2006/main">
               <a:ext uri="{FF2B5EF4-FFF2-40B4-BE49-F238E27FC236}">
-                <a16:creationId xmlns:a16="http://schemas.microsoft.com/office/drawing/2014/main" id="{FD9467AF-93B8-4039-839C-986A74A15C84}"/>
+                <a16:creationId xmlns:a16="http://schemas.microsoft.com/office/drawing/2014/main" id="{14CDFE5B-8E3F-4673-A562-5FDCD55CFBED}"/>
               </a:ext>
             </a:extLst>
           </p:cNvPr>
@@ -3384,7 +3329,7 @@
           <p:cNvPr id="13" name="">
             <a:extLst xmlns:a="http://schemas.openxmlformats.org/drawingml/2006/main">
               <a:ext uri="{FF2B5EF4-FFF2-40B4-BE49-F238E27FC236}">
-                <a16:creationId xmlns:a16="http://schemas.microsoft.com/office/drawing/2014/main" id="{03BBDB2F-B712-43DF-A70A-B2801B384425}"/>
+                <a16:creationId xmlns:a16="http://schemas.microsoft.com/office/drawing/2014/main" id="{454BA88E-BF46-4D4F-A502-2BC2E676AB06}"/>
               </a:ext>
             </a:extLst>
           </p:cNvPr>
@@ -3441,7 +3386,7 @@
           <p:cNvPr id="14" name="">
             <a:extLst xmlns:a="http://schemas.openxmlformats.org/drawingml/2006/main">
               <a:ext uri="{FF2B5EF4-FFF2-40B4-BE49-F238E27FC236}">
-                <a16:creationId xmlns:a16="http://schemas.microsoft.com/office/drawing/2014/main" id="{9DC241FB-F2B7-4ED4-834F-551E8BABFEB4}"/>
+                <a16:creationId xmlns:a16="http://schemas.microsoft.com/office/drawing/2014/main" id="{539E279A-49CC-4311-B7D9-52FD7A734018}"/>
               </a:ext>
             </a:extLst>
           </p:cNvPr>
@@ -3498,7 +3443,7 @@
           <p:cNvPr id="15" name="">
             <a:extLst xmlns:a="http://schemas.openxmlformats.org/drawingml/2006/main">
               <a:ext uri="{FF2B5EF4-FFF2-40B4-BE49-F238E27FC236}">
-                <a16:creationId xmlns:a16="http://schemas.microsoft.com/office/drawing/2014/main" id="{93191020-2732-4921-B6DC-D8D4ECF423DE}"/>
+                <a16:creationId xmlns:a16="http://schemas.microsoft.com/office/drawing/2014/main" id="{8C9DD569-E507-461E-9ABF-530DD916BC70}"/>
               </a:ext>
             </a:extLst>
           </p:cNvPr>
@@ -3555,7 +3500,7 @@
           <p:cNvPr id="16" name="">
             <a:extLst xmlns:a="http://schemas.openxmlformats.org/drawingml/2006/main">
               <a:ext uri="{FF2B5EF4-FFF2-40B4-BE49-F238E27FC236}">
-                <a16:creationId xmlns:a16="http://schemas.microsoft.com/office/drawing/2014/main" id="{B5D02CDC-FC0C-4965-8E98-61CDA84F3A08}"/>
+                <a16:creationId xmlns:a16="http://schemas.microsoft.com/office/drawing/2014/main" id="{DDCBE989-BDE4-4625-B147-E0A072FF4C6A}"/>
               </a:ext>
             </a:extLst>
           </p:cNvPr>
@@ -3587,7 +3532,7 @@
           <p:cNvPr id="17" name="">
             <a:extLst xmlns:a="http://schemas.openxmlformats.org/drawingml/2006/main">
               <a:ext uri="{FF2B5EF4-FFF2-40B4-BE49-F238E27FC236}">
-                <a16:creationId xmlns:a16="http://schemas.microsoft.com/office/drawing/2014/main" id="{66EEA8CF-023C-4E76-B677-3FCCACAD28E9}"/>
+                <a16:creationId xmlns:a16="http://schemas.microsoft.com/office/drawing/2014/main" id="{A1992BD2-E64D-489A-A6B6-F50504A2F1B0}"/>
               </a:ext>
             </a:extLst>
           </p:cNvPr>
@@ -3617,7 +3562,7 @@
           <p:cNvPr id="18" name="">
             <a:extLst xmlns:a="http://schemas.openxmlformats.org/drawingml/2006/main">
               <a:ext uri="{FF2B5EF4-FFF2-40B4-BE49-F238E27FC236}">
-                <a16:creationId xmlns:a16="http://schemas.microsoft.com/office/drawing/2014/main" id="{2B0FB586-4627-4E54-AF6F-CD55A34842AE}"/>
+                <a16:creationId xmlns:a16="http://schemas.microsoft.com/office/drawing/2014/main" id="{9454E637-4742-4638-820C-A2EBA1E78918}"/>
               </a:ext>
             </a:extLst>
           </p:cNvPr>
@@ -3674,7 +3619,7 @@
           <p:cNvPr id="19" name="">
             <a:extLst xmlns:a="http://schemas.openxmlformats.org/drawingml/2006/main">
               <a:ext uri="{FF2B5EF4-FFF2-40B4-BE49-F238E27FC236}">
-                <a16:creationId xmlns:a16="http://schemas.microsoft.com/office/drawing/2014/main" id="{A291916F-E3BE-4354-8B50-CA80E75A82AF}"/>
+                <a16:creationId xmlns:a16="http://schemas.microsoft.com/office/drawing/2014/main" id="{4BB15420-C009-4E7D-8858-0C3A878AB42C}"/>
               </a:ext>
             </a:extLst>
           </p:cNvPr>
@@ -3731,7 +3676,7 @@
           <p:cNvPr id="20" name="">
             <a:extLst xmlns:a="http://schemas.openxmlformats.org/drawingml/2006/main">
               <a:ext uri="{FF2B5EF4-FFF2-40B4-BE49-F238E27FC236}">
-                <a16:creationId xmlns:a16="http://schemas.microsoft.com/office/drawing/2014/main" id="{5892518E-9E1C-46DE-81BB-94DA70995ED2}"/>
+                <a16:creationId xmlns:a16="http://schemas.microsoft.com/office/drawing/2014/main" id="{5328C07E-93BA-4763-B61D-EA11F112A765}"/>
               </a:ext>
             </a:extLst>
           </p:cNvPr>
@@ -3788,7 +3733,7 @@
           <p:cNvPr id="21" name="">
             <a:extLst xmlns:a="http://schemas.openxmlformats.org/drawingml/2006/main">
               <a:ext uri="{FF2B5EF4-FFF2-40B4-BE49-F238E27FC236}">
-                <a16:creationId xmlns:a16="http://schemas.microsoft.com/office/drawing/2014/main" id="{D23B6AC8-7BBC-4571-ABDF-35C11BE65178}"/>
+                <a16:creationId xmlns:a16="http://schemas.microsoft.com/office/drawing/2014/main" id="{F22BFD62-4A57-4B3A-AFF7-9A73F806BA8D}"/>
               </a:ext>
             </a:extLst>
           </p:cNvPr>
@@ -3820,7 +3765,7 @@
           <p:cNvPr id="22" name="">
             <a:extLst xmlns:a="http://schemas.openxmlformats.org/drawingml/2006/main">
               <a:ext uri="{FF2B5EF4-FFF2-40B4-BE49-F238E27FC236}">
-                <a16:creationId xmlns:a16="http://schemas.microsoft.com/office/drawing/2014/main" id="{A569A40D-F36C-4245-BC9D-0027F2044CC0}"/>
+                <a16:creationId xmlns:a16="http://schemas.microsoft.com/office/drawing/2014/main" id="{E3735FEB-4433-4177-909B-FA27C2C342D4}"/>
               </a:ext>
             </a:extLst>
           </p:cNvPr>
@@ -3850,7 +3795,7 @@
           <p:cNvPr id="23" name="">
             <a:extLst xmlns:a="http://schemas.openxmlformats.org/drawingml/2006/main">
               <a:ext uri="{FF2B5EF4-FFF2-40B4-BE49-F238E27FC236}">
-                <a16:creationId xmlns:a16="http://schemas.microsoft.com/office/drawing/2014/main" id="{6D70FE1B-220E-43C4-A3C4-8C9308D66366}"/>
+                <a16:creationId xmlns:a16="http://schemas.microsoft.com/office/drawing/2014/main" id="{8DE5A9A9-B99D-46E6-8FFE-7D26D2A333F5}"/>
               </a:ext>
             </a:extLst>
           </p:cNvPr>
@@ -3907,7 +3852,7 @@
           <p:cNvPr id="24" name="">
             <a:extLst xmlns:a="http://schemas.openxmlformats.org/drawingml/2006/main">
               <a:ext uri="{FF2B5EF4-FFF2-40B4-BE49-F238E27FC236}">
-                <a16:creationId xmlns:a16="http://schemas.microsoft.com/office/drawing/2014/main" id="{84B0B9B2-86C3-4B86-A484-B3B4AA18DB8C}"/>
+                <a16:creationId xmlns:a16="http://schemas.microsoft.com/office/drawing/2014/main" id="{2B534FA5-A429-455F-86A1-26FD01FBBCB0}"/>
               </a:ext>
             </a:extLst>
           </p:cNvPr>
@@ -3964,7 +3909,7 @@
           <p:cNvPr id="25" name="">
             <a:extLst xmlns:a="http://schemas.openxmlformats.org/drawingml/2006/main">
               <a:ext uri="{FF2B5EF4-FFF2-40B4-BE49-F238E27FC236}">
-                <a16:creationId xmlns:a16="http://schemas.microsoft.com/office/drawing/2014/main" id="{CE587D14-5923-4DAB-AD80-1FECC80AF245}"/>
+                <a16:creationId xmlns:a16="http://schemas.microsoft.com/office/drawing/2014/main" id="{86F0E46E-BC56-4036-B275-492CF84D54E0}"/>
               </a:ext>
             </a:extLst>
           </p:cNvPr>
@@ -4021,7 +3966,7 @@
           <p:cNvPr id="26" name="">
             <a:extLst xmlns:a="http://schemas.openxmlformats.org/drawingml/2006/main">
               <a:ext uri="{FF2B5EF4-FFF2-40B4-BE49-F238E27FC236}">
-                <a16:creationId xmlns:a16="http://schemas.microsoft.com/office/drawing/2014/main" id="{29CB8BFC-5286-4900-A7A5-AC7DD9F7BFAE}"/>
+                <a16:creationId xmlns:a16="http://schemas.microsoft.com/office/drawing/2014/main" id="{9D8413FF-3E9C-4A7D-8B51-3693B9390AC6}"/>
               </a:ext>
             </a:extLst>
           </p:cNvPr>
@@ -4051,7 +3996,7 @@
           <p:cNvPr id="27" name="">
             <a:extLst xmlns:a="http://schemas.openxmlformats.org/drawingml/2006/main">
               <a:ext uri="{FF2B5EF4-FFF2-40B4-BE49-F238E27FC236}">
-                <a16:creationId xmlns:a16="http://schemas.microsoft.com/office/drawing/2014/main" id="{E3D3366E-2579-4B77-803A-62C8E9AC65E8}"/>
+                <a16:creationId xmlns:a16="http://schemas.microsoft.com/office/drawing/2014/main" id="{F15623B8-71DB-4AB1-A55D-A4C202AAEB2A}"/>
               </a:ext>
             </a:extLst>
           </p:cNvPr>
@@ -4108,7 +4053,7 @@
           <p:cNvPr id="28" name="">
             <a:extLst xmlns:a="http://schemas.openxmlformats.org/drawingml/2006/main">
               <a:ext uri="{FF2B5EF4-FFF2-40B4-BE49-F238E27FC236}">
-                <a16:creationId xmlns:a16="http://schemas.microsoft.com/office/drawing/2014/main" id="{DADFC702-7A04-412C-8537-C8097B456933}"/>
+                <a16:creationId xmlns:a16="http://schemas.microsoft.com/office/drawing/2014/main" id="{4169B64E-593A-4A34-8DFA-B7E3A59B246E}"/>
               </a:ext>
             </a:extLst>
           </p:cNvPr>
@@ -4138,7 +4083,7 @@
           <p:cNvPr id="29" name="">
             <a:extLst xmlns:a="http://schemas.openxmlformats.org/drawingml/2006/main">
               <a:ext uri="{FF2B5EF4-FFF2-40B4-BE49-F238E27FC236}">
-                <a16:creationId xmlns:a16="http://schemas.microsoft.com/office/drawing/2014/main" id="{C7FD8830-5A6A-4B1A-A28E-628BF9ECD4E5}"/>
+                <a16:creationId xmlns:a16="http://schemas.microsoft.com/office/drawing/2014/main" id="{5EB8139E-B332-4CFB-B3B6-1F387BA35DD2}"/>
               </a:ext>
             </a:extLst>
           </p:cNvPr>
@@ -4195,7 +4140,7 @@
           <p:cNvPr id="30" name="">
             <a:extLst xmlns:a="http://schemas.openxmlformats.org/drawingml/2006/main">
               <a:ext uri="{FF2B5EF4-FFF2-40B4-BE49-F238E27FC236}">
-                <a16:creationId xmlns:a16="http://schemas.microsoft.com/office/drawing/2014/main" id="{59037C5E-B10E-42FF-8617-CA82522D495E}"/>
+                <a16:creationId xmlns:a16="http://schemas.microsoft.com/office/drawing/2014/main" id="{BDDFAFAC-8437-4EAC-9912-395F293365BE}"/>
               </a:ext>
             </a:extLst>
           </p:cNvPr>
@@ -4250,7 +4195,7 @@
     </p:spTree>
     <p:extLst>
       <p:ext uri="{BB962C8B-B14F-4D97-AF65-F5344CB8AC3E}">
-        <p14:creationId xmlns:p14="http://schemas.microsoft.com/office/powerpoint/2010/main" val="1404761727"/>
+        <p14:creationId xmlns:p14="http://schemas.microsoft.com/office/powerpoint/2010/main" val="1931742489"/>
       </p:ext>
     </p:extLst>
   </p:cSld>

--- a/retrieval-retrieval-placemat-template.pptx
+++ b/retrieval-retrieval-placemat-template.pptx
@@ -2,13 +2,13 @@
 <file path=ppt/presentation.xml><?xml version="1.0" encoding="utf-8"?>
 <p:presentation xmlns:p="http://schemas.openxmlformats.org/presentationml/2006/main">
   <p:sldMasterIdLst>
-    <p:sldMasterId xmlns:r="http://schemas.openxmlformats.org/officeDocument/2006/relationships" id="2147483648" r:id="Rfcccc3965b2248ad"/>
+    <p:sldMasterId xmlns:r="http://schemas.openxmlformats.org/officeDocument/2006/relationships" id="2147483648" r:id="R0b33d9f897cb481c"/>
   </p:sldMasterIdLst>
   <p:notesMasterIdLst>
-    <p:notesMasterId xmlns:r="http://schemas.openxmlformats.org/officeDocument/2006/relationships" r:id="R7cfbf09cf5684918"/>
+    <p:notesMasterId xmlns:r="http://schemas.openxmlformats.org/officeDocument/2006/relationships" r:id="R2a2ef0fc80c241ab"/>
   </p:notesMasterIdLst>
   <p:sldIdLst>
-    <p:sldId xmlns:r="http://schemas.openxmlformats.org/officeDocument/2006/relationships" id="256" r:id="R0eb522b93fd941c6"/>
+    <p:sldId xmlns:r="http://schemas.openxmlformats.org/officeDocument/2006/relationships" id="256" r:id="Rcf6426c147814c54"/>
   </p:sldIdLst>
   <p:sldSz cx="12192000" cy="6858000"/>
   <p:notesSz cx="6858000" cy="9144000"/>
@@ -445,6 +445,81 @@
               <a:t>Replace bracketed text with your own taught prompts and checked answers. All labels and response areas are editable. Give everyone an independent attempt before revealing answers. Duplicate the slide for answers or another prompt. For cards, print the prompt and answer on opposite sides or fold them to keep answers hidden.</a:t>
             </a:r>
           </a:p>
+          <a:p xmlns:a="http://schemas.openxmlformats.org/drawingml/2006/main">
+            <a:r>
+              <a:t/>
+            </a:r>
+          </a:p>
+          <a:p xmlns:a="http://schemas.openxmlformats.org/drawingml/2006/main">
+            <a:r>
+              <a:t>SOURCE AND ACKNOWLEDGEMENT</a:t>
+            </a:r>
+          </a:p>
+          <a:p xmlns:a="http://schemas.openxmlformats.org/drawingml/2006/main">
+            <a:r>
+              <a:t/>
+            </a:r>
+          </a:p>
+          <a:p xmlns:a="http://schemas.openxmlformats.org/drawingml/2006/main">
+            <a:r>
+              <a:t>Shared placemat structure; TNT retrieval adaptation</a:t>
+            </a:r>
+          </a:p>
+          <a:p xmlns:a="http://schemas.openxmlformats.org/drawingml/2006/main">
+            <a:r>
+              <a:t/>
+            </a:r>
+          </a:p>
+          <a:p xmlns:a="http://schemas.openxmlformats.org/drawingml/2006/main">
+            <a:r>
+              <a:t>https://pdf.retrievalpractice.org/RetrievalPracticeGuide.pdf</a:t>
+            </a:r>
+          </a:p>
+          <a:p xmlns:a="http://schemas.openxmlformats.org/drawingml/2006/main">
+            <a:r>
+              <a:t/>
+            </a:r>
+          </a:p>
+          <a:p xmlns:a="http://schemas.openxmlformats.org/drawingml/2006/main">
+            <a:r>
+              <a:t>This uses a shared cooperative placemat layout: separate spaces for individual writing and a centre for agreed ideas. It differs from Kate Jones’s prompt-based Retrieval Practice Placemat, which she describes in her TILE article. No sole originator is verified for the cooperative layout. This guide adds independent recall and an individual retry.</a:t>
+            </a:r>
+          </a:p>
+          <a:p xmlns:a="http://schemas.openxmlformats.org/drawingml/2006/main">
+            <a:r>
+              <a:t/>
+            </a:r>
+          </a:p>
+          <a:p xmlns:a="http://schemas.openxmlformats.org/drawingml/2006/main">
+            <a:r>
+              <a:t>Related example: Kate Jones — prompt-based Retrieval Practice Placemat</a:t>
+            </a:r>
+          </a:p>
+          <a:p xmlns:a="http://schemas.openxmlformats.org/drawingml/2006/main">
+            <a:r>
+              <a:t>https://tile.psy.gla.ac.uk/2019/12/03/tile-share-best-practice-retrieval-practice-research-and-resources-for-every-classroom-by-kate-jones/</a:t>
+            </a:r>
+          </a:p>
+          <a:p xmlns:a="http://schemas.openxmlformats.org/drawingml/2006/main">
+            <a:r>
+              <a:t/>
+            </a:r>
+          </a:p>
+          <a:p xmlns:a="http://schemas.openxmlformats.org/drawingml/2006/main">
+            <a:r>
+              <a:t>Independent classroom adaptation; the source retains its own rights.</a:t>
+            </a:r>
+          </a:p>
+          <a:p xmlns:a="http://schemas.openxmlformats.org/drawingml/2006/main">
+            <a:r>
+              <a:t/>
+            </a:r>
+          </a:p>
+          <a:p xmlns:a="http://schemas.openxmlformats.org/drawingml/2006/main">
+            <a:r>
+              <a:t>Full guide: https://tnt-teaching-tools.github.io/retrieval-toolkit/retrieval-retrieval-placemat.html</a:t>
+            </a:r>
+          </a:p>
         </p:txBody>
       </p:sp>
       <p:sp>
@@ -489,7 +564,7 @@
           <p:cNvPr id="4" name="Accent rule">
             <a:extLst xmlns:a="http://schemas.openxmlformats.org/drawingml/2006/main">
               <a:ext uri="{FF2B5EF4-FFF2-40B4-BE49-F238E27FC236}">
-                <a16:creationId xmlns:a16="http://schemas.microsoft.com/office/drawing/2014/main" id="{FEA5FC85-F262-46EF-B39A-26C7F070F028}"/>
+                <a16:creationId xmlns:a16="http://schemas.microsoft.com/office/drawing/2014/main" id="{27242F87-905B-4F2B-BE1F-936977E455DD}"/>
               </a:ext>
             </a:extLst>
           </p:cNvPr>
@@ -520,7 +595,7 @@
           <p:cNvPr id="2" name="Title">
             <a:extLst xmlns:a="http://schemas.openxmlformats.org/drawingml/2006/main">
               <a:ext uri="{FF2B5EF4-FFF2-40B4-BE49-F238E27FC236}">
-                <a16:creationId xmlns:a16="http://schemas.microsoft.com/office/drawing/2014/main" id="{952021B6-88A2-460A-AC6B-156FBEEEBE7A}"/>
+                <a16:creationId xmlns:a16="http://schemas.microsoft.com/office/drawing/2014/main" id="{4BD98E97-4E52-434B-A381-A4273309CA01}"/>
               </a:ext>
             </a:extLst>
           </p:cNvPr>
@@ -561,6 +636,7 @@
                 <a:spcPts val="0"/>
               </a:spcAft>
               <a:buNone/>
+              <a:defRPr/>
             </a:lvl1pPr>
             <a:lvl2pPr marL="0" indent="0">
               <a:lnSpc>
@@ -573,6 +649,7 @@
                 <a:spcPts val="0"/>
               </a:spcAft>
               <a:buNone/>
+              <a:defRPr/>
             </a:lvl2pPr>
             <a:lvl3pPr marL="0" indent="0">
               <a:lnSpc>
@@ -585,6 +662,7 @@
                 <a:spcPts val="0"/>
               </a:spcAft>
               <a:buNone/>
+              <a:defRPr/>
             </a:lvl3pPr>
             <a:lvl4pPr marL="0" indent="0">
               <a:lnSpc>
@@ -597,6 +675,7 @@
                 <a:spcPts val="0"/>
               </a:spcAft>
               <a:buNone/>
+              <a:defRPr/>
             </a:lvl4pPr>
             <a:lvl5pPr marL="0" indent="0">
               <a:lnSpc>
@@ -609,6 +688,7 @@
                 <a:spcPts val="0"/>
               </a:spcAft>
               <a:buNone/>
+              <a:defRPr/>
             </a:lvl5pPr>
             <a:lvl6pPr marL="0" indent="0">
               <a:lnSpc>
@@ -621,6 +701,7 @@
                 <a:spcPts val="0"/>
               </a:spcAft>
               <a:buNone/>
+              <a:defRPr/>
             </a:lvl6pPr>
             <a:lvl7pPr marL="0" indent="0">
               <a:lnSpc>
@@ -633,6 +714,7 @@
                 <a:spcPts val="0"/>
               </a:spcAft>
               <a:buNone/>
+              <a:defRPr/>
             </a:lvl7pPr>
             <a:lvl8pPr marL="0" indent="0">
               <a:lnSpc>
@@ -645,6 +727,7 @@
                 <a:spcPts val="0"/>
               </a:spcAft>
               <a:buNone/>
+              <a:defRPr/>
             </a:lvl8pPr>
             <a:lvl9pPr marL="0" indent="0">
               <a:lnSpc>
@@ -657,6 +740,7 @@
                 <a:spcPts val="0"/>
               </a:spcAft>
               <a:buNone/>
+              <a:defRPr/>
             </a:lvl9pPr>
           </a:lstStyle>
           <a:p xmlns:a="http://schemas.openxmlformats.org/drawingml/2006/main"/>
@@ -667,7 +751,7 @@
           <p:cNvPr id="3" name="Subtitle">
             <a:extLst xmlns:a="http://schemas.openxmlformats.org/drawingml/2006/main">
               <a:ext uri="{FF2B5EF4-FFF2-40B4-BE49-F238E27FC236}">
-                <a16:creationId xmlns:a16="http://schemas.microsoft.com/office/drawing/2014/main" id="{005A1D9F-AD6A-4294-92E3-2F6DF2531069}"/>
+                <a16:creationId xmlns:a16="http://schemas.microsoft.com/office/drawing/2014/main" id="{5E35D7FD-72FE-468E-89F4-FA07C55A5493}"/>
               </a:ext>
             </a:extLst>
           </p:cNvPr>
@@ -708,6 +792,7 @@
                 <a:spcPts val="0"/>
               </a:spcAft>
               <a:buNone/>
+              <a:defRPr/>
             </a:lvl1pPr>
             <a:lvl2pPr marL="0" indent="0">
               <a:lnSpc>
@@ -720,6 +805,7 @@
                 <a:spcPts val="0"/>
               </a:spcAft>
               <a:buNone/>
+              <a:defRPr/>
             </a:lvl2pPr>
             <a:lvl3pPr marL="0" indent="0">
               <a:lnSpc>
@@ -732,6 +818,7 @@
                 <a:spcPts val="0"/>
               </a:spcAft>
               <a:buNone/>
+              <a:defRPr/>
             </a:lvl3pPr>
             <a:lvl4pPr marL="0" indent="0">
               <a:lnSpc>
@@ -744,6 +831,7 @@
                 <a:spcPts val="0"/>
               </a:spcAft>
               <a:buNone/>
+              <a:defRPr/>
             </a:lvl4pPr>
             <a:lvl5pPr marL="0" indent="0">
               <a:lnSpc>
@@ -756,6 +844,7 @@
                 <a:spcPts val="0"/>
               </a:spcAft>
               <a:buNone/>
+              <a:defRPr/>
             </a:lvl5pPr>
             <a:lvl6pPr marL="0" indent="0">
               <a:lnSpc>
@@ -768,6 +857,7 @@
                 <a:spcPts val="0"/>
               </a:spcAft>
               <a:buNone/>
+              <a:defRPr/>
             </a:lvl6pPr>
             <a:lvl7pPr marL="0" indent="0">
               <a:lnSpc>
@@ -780,6 +870,7 @@
                 <a:spcPts val="0"/>
               </a:spcAft>
               <a:buNone/>
+              <a:defRPr/>
             </a:lvl7pPr>
             <a:lvl8pPr marL="0" indent="0">
               <a:lnSpc>
@@ -792,6 +883,7 @@
                 <a:spcPts val="0"/>
               </a:spcAft>
               <a:buNone/>
+              <a:defRPr/>
             </a:lvl8pPr>
             <a:lvl9pPr marL="0" indent="0">
               <a:lnSpc>
@@ -804,6 +896,7 @@
                 <a:spcPts val="0"/>
               </a:spcAft>
               <a:buNone/>
+              <a:defRPr/>
             </a:lvl9pPr>
           </a:lstStyle>
           <a:p xmlns:a="http://schemas.openxmlformats.org/drawingml/2006/main"/>
@@ -831,7 +924,7 @@
           <p:cNvPr id="3" name="Accent rule">
             <a:extLst xmlns:a="http://schemas.openxmlformats.org/drawingml/2006/main">
               <a:ext uri="{FF2B5EF4-FFF2-40B4-BE49-F238E27FC236}">
-                <a16:creationId xmlns:a16="http://schemas.microsoft.com/office/drawing/2014/main" id="{E2B040A9-34B3-4128-AE38-A322B248E0F1}"/>
+                <a16:creationId xmlns:a16="http://schemas.microsoft.com/office/drawing/2014/main" id="{A1F5EC98-B332-4C60-AC92-4C0893B743E9}"/>
               </a:ext>
             </a:extLst>
           </p:cNvPr>
@@ -862,7 +955,7 @@
           <p:cNvPr id="2" name="Section title">
             <a:extLst xmlns:a="http://schemas.openxmlformats.org/drawingml/2006/main">
               <a:ext uri="{FF2B5EF4-FFF2-40B4-BE49-F238E27FC236}">
-                <a16:creationId xmlns:a16="http://schemas.microsoft.com/office/drawing/2014/main" id="{3EDD96EB-FDC8-4085-BB27-4A4DBC61354B}"/>
+                <a16:creationId xmlns:a16="http://schemas.microsoft.com/office/drawing/2014/main" id="{34E22616-78E8-428B-8FFD-BD12554E48CB}"/>
               </a:ext>
             </a:extLst>
           </p:cNvPr>
@@ -903,6 +996,7 @@
                 <a:spcPts val="0"/>
               </a:spcAft>
               <a:buNone/>
+              <a:defRPr/>
             </a:lvl1pPr>
             <a:lvl2pPr marL="0" indent="0">
               <a:lnSpc>
@@ -915,6 +1009,7 @@
                 <a:spcPts val="0"/>
               </a:spcAft>
               <a:buNone/>
+              <a:defRPr/>
             </a:lvl2pPr>
             <a:lvl3pPr marL="0" indent="0">
               <a:lnSpc>
@@ -927,6 +1022,7 @@
                 <a:spcPts val="0"/>
               </a:spcAft>
               <a:buNone/>
+              <a:defRPr/>
             </a:lvl3pPr>
             <a:lvl4pPr marL="0" indent="0">
               <a:lnSpc>
@@ -939,6 +1035,7 @@
                 <a:spcPts val="0"/>
               </a:spcAft>
               <a:buNone/>
+              <a:defRPr/>
             </a:lvl4pPr>
             <a:lvl5pPr marL="0" indent="0">
               <a:lnSpc>
@@ -951,6 +1048,7 @@
                 <a:spcPts val="0"/>
               </a:spcAft>
               <a:buNone/>
+              <a:defRPr/>
             </a:lvl5pPr>
             <a:lvl6pPr marL="0" indent="0">
               <a:lnSpc>
@@ -963,6 +1061,7 @@
                 <a:spcPts val="0"/>
               </a:spcAft>
               <a:buNone/>
+              <a:defRPr/>
             </a:lvl6pPr>
             <a:lvl7pPr marL="0" indent="0">
               <a:lnSpc>
@@ -975,6 +1074,7 @@
                 <a:spcPts val="0"/>
               </a:spcAft>
               <a:buNone/>
+              <a:defRPr/>
             </a:lvl7pPr>
             <a:lvl8pPr marL="0" indent="0">
               <a:lnSpc>
@@ -987,6 +1087,7 @@
                 <a:spcPts val="0"/>
               </a:spcAft>
               <a:buNone/>
+              <a:defRPr/>
             </a:lvl8pPr>
             <a:lvl9pPr marL="0" indent="0">
               <a:lnSpc>
@@ -999,6 +1100,7 @@
                 <a:spcPts val="0"/>
               </a:spcAft>
               <a:buNone/>
+              <a:defRPr/>
             </a:lvl9pPr>
           </a:lstStyle>
           <a:p xmlns:a="http://schemas.openxmlformats.org/drawingml/2006/main"/>
@@ -1026,7 +1128,7 @@
           <p:cNvPr id="4" name="Accent rule">
             <a:extLst xmlns:a="http://schemas.openxmlformats.org/drawingml/2006/main">
               <a:ext uri="{FF2B5EF4-FFF2-40B4-BE49-F238E27FC236}">
-                <a16:creationId xmlns:a16="http://schemas.microsoft.com/office/drawing/2014/main" id="{BD5FC6E4-4D32-4B0E-9434-518522878038}"/>
+                <a16:creationId xmlns:a16="http://schemas.microsoft.com/office/drawing/2014/main" id="{D3B05B45-CA06-4DD7-9837-B653E16E4A33}"/>
               </a:ext>
             </a:extLst>
           </p:cNvPr>
@@ -1057,7 +1159,7 @@
           <p:cNvPr id="2" name="Title">
             <a:extLst xmlns:a="http://schemas.openxmlformats.org/drawingml/2006/main">
               <a:ext uri="{FF2B5EF4-FFF2-40B4-BE49-F238E27FC236}">
-                <a16:creationId xmlns:a16="http://schemas.microsoft.com/office/drawing/2014/main" id="{78898268-2D42-4F51-BF9F-DBFE9FD869B3}"/>
+                <a16:creationId xmlns:a16="http://schemas.microsoft.com/office/drawing/2014/main" id="{51483976-C61E-4EEF-B502-520E2337A3E2}"/>
               </a:ext>
             </a:extLst>
           </p:cNvPr>
@@ -1098,6 +1200,7 @@
                 <a:spcPts val="0"/>
               </a:spcAft>
               <a:buNone/>
+              <a:defRPr/>
             </a:lvl1pPr>
             <a:lvl2pPr marL="0" indent="0">
               <a:lnSpc>
@@ -1110,6 +1213,7 @@
                 <a:spcPts val="0"/>
               </a:spcAft>
               <a:buNone/>
+              <a:defRPr/>
             </a:lvl2pPr>
             <a:lvl3pPr marL="0" indent="0">
               <a:lnSpc>
@@ -1122,6 +1226,7 @@
                 <a:spcPts val="0"/>
               </a:spcAft>
               <a:buNone/>
+              <a:defRPr/>
             </a:lvl3pPr>
             <a:lvl4pPr marL="0" indent="0">
               <a:lnSpc>
@@ -1134,6 +1239,7 @@
                 <a:spcPts val="0"/>
               </a:spcAft>
               <a:buNone/>
+              <a:defRPr/>
             </a:lvl4pPr>
             <a:lvl5pPr marL="0" indent="0">
               <a:lnSpc>
@@ -1146,6 +1252,7 @@
                 <a:spcPts val="0"/>
               </a:spcAft>
               <a:buNone/>
+              <a:defRPr/>
             </a:lvl5pPr>
             <a:lvl6pPr marL="0" indent="0">
               <a:lnSpc>
@@ -1158,6 +1265,7 @@
                 <a:spcPts val="0"/>
               </a:spcAft>
               <a:buNone/>
+              <a:defRPr/>
             </a:lvl6pPr>
             <a:lvl7pPr marL="0" indent="0">
               <a:lnSpc>
@@ -1170,6 +1278,7 @@
                 <a:spcPts val="0"/>
               </a:spcAft>
               <a:buNone/>
+              <a:defRPr/>
             </a:lvl7pPr>
             <a:lvl8pPr marL="0" indent="0">
               <a:lnSpc>
@@ -1182,6 +1291,7 @@
                 <a:spcPts val="0"/>
               </a:spcAft>
               <a:buNone/>
+              <a:defRPr/>
             </a:lvl8pPr>
             <a:lvl9pPr marL="0" indent="0">
               <a:lnSpc>
@@ -1194,6 +1304,7 @@
                 <a:spcPts val="0"/>
               </a:spcAft>
               <a:buNone/>
+              <a:defRPr/>
             </a:lvl9pPr>
           </a:lstStyle>
           <a:p xmlns:a="http://schemas.openxmlformats.org/drawingml/2006/main"/>
@@ -1204,7 +1315,7 @@
           <p:cNvPr id="3" name="Body">
             <a:extLst xmlns:a="http://schemas.openxmlformats.org/drawingml/2006/main">
               <a:ext uri="{FF2B5EF4-FFF2-40B4-BE49-F238E27FC236}">
-                <a16:creationId xmlns:a16="http://schemas.microsoft.com/office/drawing/2014/main" id="{54A57584-AA3D-4359-A6E5-83C1F6919A5B}"/>
+                <a16:creationId xmlns:a16="http://schemas.microsoft.com/office/drawing/2014/main" id="{C8FE5B40-0980-406D-81A3-94B82038F53D}"/>
               </a:ext>
             </a:extLst>
           </p:cNvPr>
@@ -1245,6 +1356,7 @@
                 <a:spcPts val="1200"/>
               </a:spcAft>
               <a:buChar char="•"/>
+              <a:defRPr/>
             </a:lvl1pPr>
             <a:lvl2pPr marL="533400" indent="-228600">
               <a:lnSpc>
@@ -1257,6 +1369,7 @@
                 <a:spcPts val="1200"/>
               </a:spcAft>
               <a:buChar char="•"/>
+              <a:defRPr/>
             </a:lvl2pPr>
             <a:lvl3pPr marL="838200" indent="-228600">
               <a:lnSpc>
@@ -1269,6 +1382,7 @@
                 <a:spcPts val="1200"/>
               </a:spcAft>
               <a:buChar char="•"/>
+              <a:defRPr/>
             </a:lvl3pPr>
             <a:lvl4pPr marL="1143000" indent="-228600">
               <a:lnSpc>
@@ -1281,6 +1395,7 @@
                 <a:spcPts val="1200"/>
               </a:spcAft>
               <a:buChar char="•"/>
+              <a:defRPr/>
             </a:lvl4pPr>
             <a:lvl5pPr marL="1447800" indent="-228600">
               <a:lnSpc>
@@ -1293,6 +1408,7 @@
                 <a:spcPts val="1200"/>
               </a:spcAft>
               <a:buChar char="•"/>
+              <a:defRPr/>
             </a:lvl5pPr>
             <a:lvl6pPr marL="1752600" indent="-228600">
               <a:lnSpc>
@@ -1305,6 +1421,7 @@
                 <a:spcPts val="1200"/>
               </a:spcAft>
               <a:buChar char="•"/>
+              <a:defRPr/>
             </a:lvl6pPr>
             <a:lvl7pPr marL="2057400" indent="-228600">
               <a:lnSpc>
@@ -1317,6 +1434,7 @@
                 <a:spcPts val="1200"/>
               </a:spcAft>
               <a:buChar char="•"/>
+              <a:defRPr/>
             </a:lvl7pPr>
             <a:lvl8pPr marL="2362200" indent="-228600">
               <a:lnSpc>
@@ -1329,6 +1447,7 @@
                 <a:spcPts val="1200"/>
               </a:spcAft>
               <a:buChar char="•"/>
+              <a:defRPr/>
             </a:lvl8pPr>
             <a:lvl9pPr marL="2667000" indent="-228600">
               <a:lnSpc>
@@ -1341,6 +1460,7 @@
                 <a:spcPts val="1200"/>
               </a:spcAft>
               <a:buChar char="•"/>
+              <a:defRPr/>
             </a:lvl9pPr>
           </a:lstStyle>
           <a:p xmlns:a="http://schemas.openxmlformats.org/drawingml/2006/main"/>
@@ -1368,7 +1488,7 @@
           <p:cNvPr id="5" name="Accent rule">
             <a:extLst xmlns:a="http://schemas.openxmlformats.org/drawingml/2006/main">
               <a:ext uri="{FF2B5EF4-FFF2-40B4-BE49-F238E27FC236}">
-                <a16:creationId xmlns:a16="http://schemas.microsoft.com/office/drawing/2014/main" id="{5B989FEB-8D4B-4181-B25F-65AE84052FF3}"/>
+                <a16:creationId xmlns:a16="http://schemas.microsoft.com/office/drawing/2014/main" id="{534DB576-6DD9-4643-9F19-1ECA6198119B}"/>
               </a:ext>
             </a:extLst>
           </p:cNvPr>
@@ -1399,7 +1519,7 @@
           <p:cNvPr id="2" name="Title">
             <a:extLst xmlns:a="http://schemas.openxmlformats.org/drawingml/2006/main">
               <a:ext uri="{FF2B5EF4-FFF2-40B4-BE49-F238E27FC236}">
-                <a16:creationId xmlns:a16="http://schemas.microsoft.com/office/drawing/2014/main" id="{79A6ADC2-D40A-4EB3-AA96-7C1853F309B7}"/>
+                <a16:creationId xmlns:a16="http://schemas.microsoft.com/office/drawing/2014/main" id="{8381C995-7CFE-47E1-90C9-D2BFAC9DC3EB}"/>
               </a:ext>
             </a:extLst>
           </p:cNvPr>
@@ -1440,6 +1560,7 @@
                 <a:spcPts val="0"/>
               </a:spcAft>
               <a:buNone/>
+              <a:defRPr/>
             </a:lvl1pPr>
             <a:lvl2pPr marL="0" indent="0">
               <a:lnSpc>
@@ -1452,6 +1573,7 @@
                 <a:spcPts val="0"/>
               </a:spcAft>
               <a:buNone/>
+              <a:defRPr/>
             </a:lvl2pPr>
             <a:lvl3pPr marL="0" indent="0">
               <a:lnSpc>
@@ -1464,6 +1586,7 @@
                 <a:spcPts val="0"/>
               </a:spcAft>
               <a:buNone/>
+              <a:defRPr/>
             </a:lvl3pPr>
             <a:lvl4pPr marL="0" indent="0">
               <a:lnSpc>
@@ -1476,6 +1599,7 @@
                 <a:spcPts val="0"/>
               </a:spcAft>
               <a:buNone/>
+              <a:defRPr/>
             </a:lvl4pPr>
             <a:lvl5pPr marL="0" indent="0">
               <a:lnSpc>
@@ -1488,6 +1612,7 @@
                 <a:spcPts val="0"/>
               </a:spcAft>
               <a:buNone/>
+              <a:defRPr/>
             </a:lvl5pPr>
             <a:lvl6pPr marL="0" indent="0">
               <a:lnSpc>
@@ -1500,6 +1625,7 @@
                 <a:spcPts val="0"/>
               </a:spcAft>
               <a:buNone/>
+              <a:defRPr/>
             </a:lvl6pPr>
             <a:lvl7pPr marL="0" indent="0">
               <a:lnSpc>
@@ -1512,6 +1638,7 @@
                 <a:spcPts val="0"/>
               </a:spcAft>
               <a:buNone/>
+              <a:defRPr/>
             </a:lvl7pPr>
             <a:lvl8pPr marL="0" indent="0">
               <a:lnSpc>
@@ -1524,6 +1651,7 @@
                 <a:spcPts val="0"/>
               </a:spcAft>
               <a:buNone/>
+              <a:defRPr/>
             </a:lvl8pPr>
             <a:lvl9pPr marL="0" indent="0">
               <a:lnSpc>
@@ -1536,6 +1664,7 @@
                 <a:spcPts val="0"/>
               </a:spcAft>
               <a:buNone/>
+              <a:defRPr/>
             </a:lvl9pPr>
           </a:lstStyle>
           <a:p xmlns:a="http://schemas.openxmlformats.org/drawingml/2006/main"/>
@@ -1546,7 +1675,7 @@
           <p:cNvPr id="3" name="Left column">
             <a:extLst xmlns:a="http://schemas.openxmlformats.org/drawingml/2006/main">
               <a:ext uri="{FF2B5EF4-FFF2-40B4-BE49-F238E27FC236}">
-                <a16:creationId xmlns:a16="http://schemas.microsoft.com/office/drawing/2014/main" id="{A9C6FAE4-3AEC-40EB-A84B-B303C3C9061D}"/>
+                <a16:creationId xmlns:a16="http://schemas.microsoft.com/office/drawing/2014/main" id="{C26002D2-F2C0-45B8-9866-4E6D1490E836}"/>
               </a:ext>
             </a:extLst>
           </p:cNvPr>
@@ -1587,6 +1716,7 @@
                 <a:spcPts val="1200"/>
               </a:spcAft>
               <a:buChar char="•"/>
+              <a:defRPr/>
             </a:lvl1pPr>
             <a:lvl2pPr marL="533400" indent="-228600">
               <a:lnSpc>
@@ -1599,6 +1729,7 @@
                 <a:spcPts val="1200"/>
               </a:spcAft>
               <a:buChar char="•"/>
+              <a:defRPr/>
             </a:lvl2pPr>
             <a:lvl3pPr marL="838200" indent="-228600">
               <a:lnSpc>
@@ -1611,6 +1742,7 @@
                 <a:spcPts val="1200"/>
               </a:spcAft>
               <a:buChar char="•"/>
+              <a:defRPr/>
             </a:lvl3pPr>
             <a:lvl4pPr marL="1143000" indent="-228600">
               <a:lnSpc>
@@ -1623,6 +1755,7 @@
                 <a:spcPts val="1200"/>
               </a:spcAft>
               <a:buChar char="•"/>
+              <a:defRPr/>
             </a:lvl4pPr>
             <a:lvl5pPr marL="1447800" indent="-228600">
               <a:lnSpc>
@@ -1635,6 +1768,7 @@
                 <a:spcPts val="1200"/>
               </a:spcAft>
               <a:buChar char="•"/>
+              <a:defRPr/>
             </a:lvl5pPr>
             <a:lvl6pPr marL="1752600" indent="-228600">
               <a:lnSpc>
@@ -1647,6 +1781,7 @@
                 <a:spcPts val="1200"/>
               </a:spcAft>
               <a:buChar char="•"/>
+              <a:defRPr/>
             </a:lvl6pPr>
             <a:lvl7pPr marL="2057400" indent="-228600">
               <a:lnSpc>
@@ -1659,6 +1794,7 @@
                 <a:spcPts val="1200"/>
               </a:spcAft>
               <a:buChar char="•"/>
+              <a:defRPr/>
             </a:lvl7pPr>
             <a:lvl8pPr marL="2362200" indent="-228600">
               <a:lnSpc>
@@ -1671,6 +1807,7 @@
                 <a:spcPts val="1200"/>
               </a:spcAft>
               <a:buChar char="•"/>
+              <a:defRPr/>
             </a:lvl8pPr>
             <a:lvl9pPr marL="2667000" indent="-228600">
               <a:lnSpc>
@@ -1683,6 +1820,7 @@
                 <a:spcPts val="1200"/>
               </a:spcAft>
               <a:buChar char="•"/>
+              <a:defRPr/>
             </a:lvl9pPr>
           </a:lstStyle>
           <a:p xmlns:a="http://schemas.openxmlformats.org/drawingml/2006/main"/>
@@ -1693,7 +1831,7 @@
           <p:cNvPr id="4" name="Right column">
             <a:extLst xmlns:a="http://schemas.openxmlformats.org/drawingml/2006/main">
               <a:ext uri="{FF2B5EF4-FFF2-40B4-BE49-F238E27FC236}">
-                <a16:creationId xmlns:a16="http://schemas.microsoft.com/office/drawing/2014/main" id="{A05A39A8-D38B-4D57-B0C0-290FE55E4C15}"/>
+                <a16:creationId xmlns:a16="http://schemas.microsoft.com/office/drawing/2014/main" id="{78F29CD4-FA8F-4BBD-A170-10D797646F57}"/>
               </a:ext>
             </a:extLst>
           </p:cNvPr>
@@ -1734,6 +1872,7 @@
                 <a:spcPts val="1200"/>
               </a:spcAft>
               <a:buChar char="•"/>
+              <a:defRPr/>
             </a:lvl1pPr>
             <a:lvl2pPr marL="533400" indent="-228600">
               <a:lnSpc>
@@ -1746,6 +1885,7 @@
                 <a:spcPts val="1200"/>
               </a:spcAft>
               <a:buChar char="•"/>
+              <a:defRPr/>
             </a:lvl2pPr>
             <a:lvl3pPr marL="838200" indent="-228600">
               <a:lnSpc>
@@ -1758,6 +1898,7 @@
                 <a:spcPts val="1200"/>
               </a:spcAft>
               <a:buChar char="•"/>
+              <a:defRPr/>
             </a:lvl3pPr>
             <a:lvl4pPr marL="1143000" indent="-228600">
               <a:lnSpc>
@@ -1770,6 +1911,7 @@
                 <a:spcPts val="1200"/>
               </a:spcAft>
               <a:buChar char="•"/>
+              <a:defRPr/>
             </a:lvl4pPr>
             <a:lvl5pPr marL="1447800" indent="-228600">
               <a:lnSpc>
@@ -1782,6 +1924,7 @@
                 <a:spcPts val="1200"/>
               </a:spcAft>
               <a:buChar char="•"/>
+              <a:defRPr/>
             </a:lvl5pPr>
             <a:lvl6pPr marL="1752600" indent="-228600">
               <a:lnSpc>
@@ -1794,6 +1937,7 @@
                 <a:spcPts val="1200"/>
               </a:spcAft>
               <a:buChar char="•"/>
+              <a:defRPr/>
             </a:lvl6pPr>
             <a:lvl7pPr marL="2057400" indent="-228600">
               <a:lnSpc>
@@ -1806,6 +1950,7 @@
                 <a:spcPts val="1200"/>
               </a:spcAft>
               <a:buChar char="•"/>
+              <a:defRPr/>
             </a:lvl7pPr>
             <a:lvl8pPr marL="2362200" indent="-228600">
               <a:lnSpc>
@@ -1818,6 +1963,7 @@
                 <a:spcPts val="1200"/>
               </a:spcAft>
               <a:buChar char="•"/>
+              <a:defRPr/>
             </a:lvl8pPr>
             <a:lvl9pPr marL="2667000" indent="-228600">
               <a:lnSpc>
@@ -1830,6 +1976,7 @@
                 <a:spcPts val="1200"/>
               </a:spcAft>
               <a:buChar char="•"/>
+              <a:defRPr/>
             </a:lvl9pPr>
           </a:lstStyle>
           <a:p xmlns:a="http://schemas.openxmlformats.org/drawingml/2006/main"/>
@@ -1857,7 +2004,7 @@
           <p:cNvPr id="4" name="Accent rule">
             <a:extLst xmlns:a="http://schemas.openxmlformats.org/drawingml/2006/main">
               <a:ext uri="{FF2B5EF4-FFF2-40B4-BE49-F238E27FC236}">
-                <a16:creationId xmlns:a16="http://schemas.microsoft.com/office/drawing/2014/main" id="{81F512E9-025C-444E-8D81-C4A34E324DE8}"/>
+                <a16:creationId xmlns:a16="http://schemas.microsoft.com/office/drawing/2014/main" id="{9E7F561C-5AE5-41A4-81BC-E9E918ECA8C0}"/>
               </a:ext>
             </a:extLst>
           </p:cNvPr>
@@ -1888,7 +2035,7 @@
           <p:cNvPr id="2" name="Title">
             <a:extLst xmlns:a="http://schemas.openxmlformats.org/drawingml/2006/main">
               <a:ext uri="{FF2B5EF4-FFF2-40B4-BE49-F238E27FC236}">
-                <a16:creationId xmlns:a16="http://schemas.microsoft.com/office/drawing/2014/main" id="{622F2B5E-5882-4D3D-AF54-7A857D575E2E}"/>
+                <a16:creationId xmlns:a16="http://schemas.microsoft.com/office/drawing/2014/main" id="{54A37B16-7265-48FE-B92D-7845B1049CF6}"/>
               </a:ext>
             </a:extLst>
           </p:cNvPr>
@@ -1929,6 +2076,7 @@
                 <a:spcPts val="0"/>
               </a:spcAft>
               <a:buNone/>
+              <a:defRPr/>
             </a:lvl1pPr>
             <a:lvl2pPr marL="0" indent="0">
               <a:lnSpc>
@@ -1941,6 +2089,7 @@
                 <a:spcPts val="0"/>
               </a:spcAft>
               <a:buNone/>
+              <a:defRPr/>
             </a:lvl2pPr>
             <a:lvl3pPr marL="0" indent="0">
               <a:lnSpc>
@@ -1953,6 +2102,7 @@
                 <a:spcPts val="0"/>
               </a:spcAft>
               <a:buNone/>
+              <a:defRPr/>
             </a:lvl3pPr>
             <a:lvl4pPr marL="0" indent="0">
               <a:lnSpc>
@@ -1965,6 +2115,7 @@
                 <a:spcPts val="0"/>
               </a:spcAft>
               <a:buNone/>
+              <a:defRPr/>
             </a:lvl4pPr>
             <a:lvl5pPr marL="0" indent="0">
               <a:lnSpc>
@@ -1977,6 +2128,7 @@
                 <a:spcPts val="0"/>
               </a:spcAft>
               <a:buNone/>
+              <a:defRPr/>
             </a:lvl5pPr>
             <a:lvl6pPr marL="0" indent="0">
               <a:lnSpc>
@@ -1989,6 +2141,7 @@
                 <a:spcPts val="0"/>
               </a:spcAft>
               <a:buNone/>
+              <a:defRPr/>
             </a:lvl6pPr>
             <a:lvl7pPr marL="0" indent="0">
               <a:lnSpc>
@@ -2001,6 +2154,7 @@
                 <a:spcPts val="0"/>
               </a:spcAft>
               <a:buNone/>
+              <a:defRPr/>
             </a:lvl7pPr>
             <a:lvl8pPr marL="0" indent="0">
               <a:lnSpc>
@@ -2013,6 +2167,7 @@
                 <a:spcPts val="0"/>
               </a:spcAft>
               <a:buNone/>
+              <a:defRPr/>
             </a:lvl8pPr>
             <a:lvl9pPr marL="0" indent="0">
               <a:lnSpc>
@@ -2025,6 +2180,7 @@
                 <a:spcPts val="0"/>
               </a:spcAft>
               <a:buNone/>
+              <a:defRPr/>
             </a:lvl9pPr>
           </a:lstStyle>
           <a:p xmlns:a="http://schemas.openxmlformats.org/drawingml/2006/main"/>
@@ -2035,7 +2191,7 @@
           <p:cNvPr id="3" name="Left column">
             <a:extLst xmlns:a="http://schemas.openxmlformats.org/drawingml/2006/main">
               <a:ext uri="{FF2B5EF4-FFF2-40B4-BE49-F238E27FC236}">
-                <a16:creationId xmlns:a16="http://schemas.microsoft.com/office/drawing/2014/main" id="{2BE40E1A-7AC9-4E47-8A5F-CA0269ED1420}"/>
+                <a16:creationId xmlns:a16="http://schemas.microsoft.com/office/drawing/2014/main" id="{B6AC10D3-0834-4999-8F7C-78A7D20DCF89}"/>
               </a:ext>
             </a:extLst>
           </p:cNvPr>
@@ -2076,6 +2232,7 @@
                 <a:spcPts val="1200"/>
               </a:spcAft>
               <a:buChar char="•"/>
+              <a:defRPr/>
             </a:lvl1pPr>
             <a:lvl2pPr marL="533400" indent="-228600">
               <a:lnSpc>
@@ -2088,6 +2245,7 @@
                 <a:spcPts val="1200"/>
               </a:spcAft>
               <a:buChar char="•"/>
+              <a:defRPr/>
             </a:lvl2pPr>
             <a:lvl3pPr marL="838200" indent="-228600">
               <a:lnSpc>
@@ -2100,6 +2258,7 @@
                 <a:spcPts val="1200"/>
               </a:spcAft>
               <a:buChar char="•"/>
+              <a:defRPr/>
             </a:lvl3pPr>
             <a:lvl4pPr marL="1143000" indent="-228600">
               <a:lnSpc>
@@ -2112,6 +2271,7 @@
                 <a:spcPts val="1200"/>
               </a:spcAft>
               <a:buChar char="•"/>
+              <a:defRPr/>
             </a:lvl4pPr>
             <a:lvl5pPr marL="1447800" indent="-228600">
               <a:lnSpc>
@@ -2124,6 +2284,7 @@
                 <a:spcPts val="1200"/>
               </a:spcAft>
               <a:buChar char="•"/>
+              <a:defRPr/>
             </a:lvl5pPr>
             <a:lvl6pPr marL="1752600" indent="-228600">
               <a:lnSpc>
@@ -2136,6 +2297,7 @@
                 <a:spcPts val="1200"/>
               </a:spcAft>
               <a:buChar char="•"/>
+              <a:defRPr/>
             </a:lvl6pPr>
             <a:lvl7pPr marL="2057400" indent="-228600">
               <a:lnSpc>
@@ -2148,6 +2310,7 @@
                 <a:spcPts val="1200"/>
               </a:spcAft>
               <a:buChar char="•"/>
+              <a:defRPr/>
             </a:lvl7pPr>
             <a:lvl8pPr marL="2362200" indent="-228600">
               <a:lnSpc>
@@ -2160,6 +2323,7 @@
                 <a:spcPts val="1200"/>
               </a:spcAft>
               <a:buChar char="•"/>
+              <a:defRPr/>
             </a:lvl8pPr>
             <a:lvl9pPr marL="2667000" indent="-228600">
               <a:lnSpc>
@@ -2172,6 +2336,7 @@
                 <a:spcPts val="1200"/>
               </a:spcAft>
               <a:buChar char="•"/>
+              <a:defRPr/>
             </a:lvl9pPr>
           </a:lstStyle>
           <a:p xmlns:a="http://schemas.openxmlformats.org/drawingml/2006/main"/>
@@ -2220,12 +2385,12 @@
   </p:cSld>
   <p:clrMap bg1="lt1" tx1="dk1" bg2="lt2" tx2="dk2" accent1="accent1" accent2="accent2" accent3="accent3" accent4="accent4" accent5="accent5" accent6="accent6" hlink="hlink" folHlink="folHlink"/>
   <p:sldLayoutIdLst>
-    <p:sldLayoutId xmlns:r="http://schemas.openxmlformats.org/officeDocument/2006/relationships" id="2147483649" r:id="R0f9da46346c04406"/>
-    <p:sldLayoutId xmlns:r="http://schemas.openxmlformats.org/officeDocument/2006/relationships" id="2147483650" r:id="R98c464f3b8ef49ff"/>
-    <p:sldLayoutId xmlns:r="http://schemas.openxmlformats.org/officeDocument/2006/relationships" id="2147483651" r:id="R53637a7d63db441e"/>
-    <p:sldLayoutId xmlns:r="http://schemas.openxmlformats.org/officeDocument/2006/relationships" id="2147483652" r:id="Rcdaad14665804cbb"/>
-    <p:sldLayoutId xmlns:r="http://schemas.openxmlformats.org/officeDocument/2006/relationships" id="2147483653" r:id="R775da41654354bd2"/>
-    <p:sldLayoutId xmlns:r="http://schemas.openxmlformats.org/officeDocument/2006/relationships" id="2147483654" r:id="Rcf3b36af51df48dc"/>
+    <p:sldLayoutId xmlns:r="http://schemas.openxmlformats.org/officeDocument/2006/relationships" id="2147483649" r:id="R48eeb61999bf4ed3"/>
+    <p:sldLayoutId xmlns:r="http://schemas.openxmlformats.org/officeDocument/2006/relationships" id="2147483650" r:id="R5608e5ae5deb4980"/>
+    <p:sldLayoutId xmlns:r="http://schemas.openxmlformats.org/officeDocument/2006/relationships" id="2147483651" r:id="Rb766e90ffd614781"/>
+    <p:sldLayoutId xmlns:r="http://schemas.openxmlformats.org/officeDocument/2006/relationships" id="2147483652" r:id="Rbb0aa0e5066f4119"/>
+    <p:sldLayoutId xmlns:r="http://schemas.openxmlformats.org/officeDocument/2006/relationships" id="2147483653" r:id="R77757cebc7514c98"/>
+    <p:sldLayoutId xmlns:r="http://schemas.openxmlformats.org/officeDocument/2006/relationships" id="2147483654" r:id="R0a53a529d4ad4558"/>
   </p:sldLayoutIdLst>
   <p:txStyles>
     <p:titleStyle>
@@ -2776,7 +2941,7 @@
           <p:cNvPr id="31" name="">
             <a:extLst xmlns:a="http://schemas.openxmlformats.org/drawingml/2006/main">
               <a:ext uri="{FF2B5EF4-FFF2-40B4-BE49-F238E27FC236}">
-                <a16:creationId xmlns:a16="http://schemas.microsoft.com/office/drawing/2014/main" id="{67909537-E670-4291-B71C-365C8425FAF2}"/>
+                <a16:creationId xmlns:a16="http://schemas.microsoft.com/office/drawing/2014/main" id="{D7ED5850-F804-4E89-A059-631F4CA2E939}"/>
               </a:ext>
             </a:extLst>
           </p:cNvPr>
@@ -2805,6 +2970,7 @@
           <a:lstStyle xmlns:a="http://schemas.openxmlformats.org/drawingml/2006/main"/>
           <a:p xmlns:a="http://schemas.openxmlformats.org/drawingml/2006/main">
             <a:pPr>
+              <a:buNone/>
               <a:defRPr sz="3450" b="1">
                 <a:solidFill>
                   <a:srgbClr val="263C3A"/>
@@ -2823,7 +2989,7 @@
                 <a:ea typeface="DejaVu Sans"/>
                 <a:cs typeface="DejaVu Sans"/>
               </a:rPr>
-              <a:t>Retrieval placemat</a:t>
+              <a:t>Group recall placemat</a:t>
             </a:r>
           </a:p>
         </p:txBody>
@@ -2833,7 +2999,7 @@
           <p:cNvPr id="2" name="">
             <a:extLst xmlns:a="http://schemas.openxmlformats.org/drawingml/2006/main">
               <a:ext uri="{FF2B5EF4-FFF2-40B4-BE49-F238E27FC236}">
-                <a16:creationId xmlns:a16="http://schemas.microsoft.com/office/drawing/2014/main" id="{2A931361-1ED0-4A34-9DCF-ED725B789C2C}"/>
+                <a16:creationId xmlns:a16="http://schemas.microsoft.com/office/drawing/2014/main" id="{72B8F12C-E194-4A04-8DB9-980FB6D03455}"/>
               </a:ext>
             </a:extLst>
           </p:cNvPr>
@@ -2862,6 +3028,7 @@
           <a:lstStyle xmlns:a="http://schemas.openxmlformats.org/drawingml/2006/main"/>
           <a:p xmlns:a="http://schemas.openxmlformats.org/drawingml/2006/main">
             <a:pPr>
+              <a:buNone/>
               <a:defRPr sz="2175" b="0">
                 <a:solidFill>
                   <a:srgbClr val="687572"/>
@@ -2890,7 +3057,7 @@
           <p:cNvPr id="3" name="">
             <a:extLst xmlns:a="http://schemas.openxmlformats.org/drawingml/2006/main">
               <a:ext uri="{FF2B5EF4-FFF2-40B4-BE49-F238E27FC236}">
-                <a16:creationId xmlns:a16="http://schemas.microsoft.com/office/drawing/2014/main" id="{8736338E-9358-4777-B1F5-645B7BA59786}"/>
+                <a16:creationId xmlns:a16="http://schemas.microsoft.com/office/drawing/2014/main" id="{39D4144E-ABAA-4EEE-96D0-36326058760E}"/>
               </a:ext>
             </a:extLst>
           </p:cNvPr>
@@ -2920,7 +3087,7 @@
           <p:cNvPr id="4" name="">
             <a:extLst xmlns:a="http://schemas.openxmlformats.org/drawingml/2006/main">
               <a:ext uri="{FF2B5EF4-FFF2-40B4-BE49-F238E27FC236}">
-                <a16:creationId xmlns:a16="http://schemas.microsoft.com/office/drawing/2014/main" id="{AAF0BC9A-BF1E-445B-AD86-C44858BD049D}"/>
+                <a16:creationId xmlns:a16="http://schemas.microsoft.com/office/drawing/2014/main" id="{0257EAF7-E54E-453D-8D76-DC811552FAB9}"/>
               </a:ext>
             </a:extLst>
           </p:cNvPr>
@@ -2949,6 +3116,7 @@
           <a:lstStyle xmlns:a="http://schemas.openxmlformats.org/drawingml/2006/main"/>
           <a:p xmlns:a="http://schemas.openxmlformats.org/drawingml/2006/main">
             <a:pPr>
+              <a:buNone/>
               <a:defRPr sz="1575" b="1">
                 <a:solidFill>
                   <a:srgbClr val="263C3A"/>
@@ -2977,7 +3145,7 @@
           <p:cNvPr id="5" name="">
             <a:extLst xmlns:a="http://schemas.openxmlformats.org/drawingml/2006/main">
               <a:ext uri="{FF2B5EF4-FFF2-40B4-BE49-F238E27FC236}">
-                <a16:creationId xmlns:a16="http://schemas.microsoft.com/office/drawing/2014/main" id="{5D7C6191-7167-4882-AB9D-B0BE29A610F0}"/>
+                <a16:creationId xmlns:a16="http://schemas.microsoft.com/office/drawing/2014/main" id="{AA084FB4-C601-461C-A624-E6CD0FEC3DF6}"/>
               </a:ext>
             </a:extLst>
           </p:cNvPr>
@@ -3006,6 +3174,7 @@
           <a:lstStyle xmlns:a="http://schemas.openxmlformats.org/drawingml/2006/main"/>
           <a:p xmlns:a="http://schemas.openxmlformats.org/drawingml/2006/main">
             <a:pPr>
+              <a:buNone/>
               <a:defRPr sz="1575" b="1">
                 <a:solidFill>
                   <a:srgbClr val="263C3A"/>
@@ -3034,7 +3203,7 @@
           <p:cNvPr id="6" name="">
             <a:extLst xmlns:a="http://schemas.openxmlformats.org/drawingml/2006/main">
               <a:ext uri="{FF2B5EF4-FFF2-40B4-BE49-F238E27FC236}">
-                <a16:creationId xmlns:a16="http://schemas.microsoft.com/office/drawing/2014/main" id="{2C6B341C-BA91-4940-9157-1D667ABA956E}"/>
+                <a16:creationId xmlns:a16="http://schemas.microsoft.com/office/drawing/2014/main" id="{07136C1F-E316-4428-831C-5AA7DB2942E6}"/>
               </a:ext>
             </a:extLst>
           </p:cNvPr>
@@ -3066,7 +3235,7 @@
           <p:cNvPr id="7" name="">
             <a:extLst xmlns:a="http://schemas.openxmlformats.org/drawingml/2006/main">
               <a:ext uri="{FF2B5EF4-FFF2-40B4-BE49-F238E27FC236}">
-                <a16:creationId xmlns:a16="http://schemas.microsoft.com/office/drawing/2014/main" id="{8A65C7EB-05D1-416C-A5FC-81F39BEAD667}"/>
+                <a16:creationId xmlns:a16="http://schemas.microsoft.com/office/drawing/2014/main" id="{1BA1F3CA-DCD8-4981-9966-2457BADF3439}"/>
               </a:ext>
             </a:extLst>
           </p:cNvPr>
@@ -3096,7 +3265,7 @@
           <p:cNvPr id="8" name="">
             <a:extLst xmlns:a="http://schemas.openxmlformats.org/drawingml/2006/main">
               <a:ext uri="{FF2B5EF4-FFF2-40B4-BE49-F238E27FC236}">
-                <a16:creationId xmlns:a16="http://schemas.microsoft.com/office/drawing/2014/main" id="{676E1AB8-D365-4461-A881-0A584756C9F7}"/>
+                <a16:creationId xmlns:a16="http://schemas.microsoft.com/office/drawing/2014/main" id="{A083121E-44F6-4CE9-9DF3-9CA4ECC246D7}"/>
               </a:ext>
             </a:extLst>
           </p:cNvPr>
@@ -3125,6 +3294,7 @@
           <a:lstStyle xmlns:a="http://schemas.openxmlformats.org/drawingml/2006/main"/>
           <a:p xmlns:a="http://schemas.openxmlformats.org/drawingml/2006/main">
             <a:pPr>
+              <a:buNone/>
               <a:defRPr sz="1350" b="1">
                 <a:solidFill>
                   <a:srgbClr val="263C3A"/>
@@ -3153,7 +3323,7 @@
           <p:cNvPr id="9" name="">
             <a:extLst xmlns:a="http://schemas.openxmlformats.org/drawingml/2006/main">
               <a:ext uri="{FF2B5EF4-FFF2-40B4-BE49-F238E27FC236}">
-                <a16:creationId xmlns:a16="http://schemas.microsoft.com/office/drawing/2014/main" id="{00F0BCFB-08C6-4429-8D75-BA082B9BF4E9}"/>
+                <a16:creationId xmlns:a16="http://schemas.microsoft.com/office/drawing/2014/main" id="{24ECA872-90AA-4351-AD61-F10B23CDA43F}"/>
               </a:ext>
             </a:extLst>
           </p:cNvPr>
@@ -3182,6 +3352,7 @@
           <a:lstStyle xmlns:a="http://schemas.openxmlformats.org/drawingml/2006/main"/>
           <a:p xmlns:a="http://schemas.openxmlformats.org/drawingml/2006/main">
             <a:pPr>
+              <a:buNone/>
               <a:defRPr sz="1725" b="1">
                 <a:solidFill>
                   <a:srgbClr val="263C3A"/>
@@ -3210,7 +3381,7 @@
           <p:cNvPr id="10" name="">
             <a:extLst xmlns:a="http://schemas.openxmlformats.org/drawingml/2006/main">
               <a:ext uri="{FF2B5EF4-FFF2-40B4-BE49-F238E27FC236}">
-                <a16:creationId xmlns:a16="http://schemas.microsoft.com/office/drawing/2014/main" id="{83F26DE1-8E16-48E5-8D86-3E2AD82EC310}"/>
+                <a16:creationId xmlns:a16="http://schemas.microsoft.com/office/drawing/2014/main" id="{8957AE9F-BFA3-4D31-B704-0D769D52DBF7}"/>
               </a:ext>
             </a:extLst>
           </p:cNvPr>
@@ -3239,6 +3410,7 @@
           <a:lstStyle xmlns:a="http://schemas.openxmlformats.org/drawingml/2006/main"/>
           <a:p xmlns:a="http://schemas.openxmlformats.org/drawingml/2006/main">
             <a:pPr>
+              <a:buNone/>
               <a:defRPr sz="1950" b="0">
                 <a:solidFill>
                   <a:srgbClr val="687572"/>
@@ -3267,7 +3439,7 @@
           <p:cNvPr id="11" name="">
             <a:extLst xmlns:a="http://schemas.openxmlformats.org/drawingml/2006/main">
               <a:ext uri="{FF2B5EF4-FFF2-40B4-BE49-F238E27FC236}">
-                <a16:creationId xmlns:a16="http://schemas.microsoft.com/office/drawing/2014/main" id="{76D032AB-5D7F-46A9-8453-300A6245917B}"/>
+                <a16:creationId xmlns:a16="http://schemas.microsoft.com/office/drawing/2014/main" id="{1359C188-73C1-443D-832C-FE85CB9C9A34}"/>
               </a:ext>
             </a:extLst>
           </p:cNvPr>
@@ -3299,7 +3471,7 @@
           <p:cNvPr id="12" name="">
             <a:extLst xmlns:a="http://schemas.openxmlformats.org/drawingml/2006/main">
               <a:ext uri="{FF2B5EF4-FFF2-40B4-BE49-F238E27FC236}">
-                <a16:creationId xmlns:a16="http://schemas.microsoft.com/office/drawing/2014/main" id="{14CDFE5B-8E3F-4673-A562-5FDCD55CFBED}"/>
+                <a16:creationId xmlns:a16="http://schemas.microsoft.com/office/drawing/2014/main" id="{89BEADAB-DA7F-40AE-8D6C-ED5AE926281A}"/>
               </a:ext>
             </a:extLst>
           </p:cNvPr>
@@ -3329,7 +3501,7 @@
           <p:cNvPr id="13" name="">
             <a:extLst xmlns:a="http://schemas.openxmlformats.org/drawingml/2006/main">
               <a:ext uri="{FF2B5EF4-FFF2-40B4-BE49-F238E27FC236}">
-                <a16:creationId xmlns:a16="http://schemas.microsoft.com/office/drawing/2014/main" id="{454BA88E-BF46-4D4F-A502-2BC2E676AB06}"/>
+                <a16:creationId xmlns:a16="http://schemas.microsoft.com/office/drawing/2014/main" id="{C599E7A3-E7B8-4828-A400-16698F513AF6}"/>
               </a:ext>
             </a:extLst>
           </p:cNvPr>
@@ -3358,6 +3530,7 @@
           <a:lstStyle xmlns:a="http://schemas.openxmlformats.org/drawingml/2006/main"/>
           <a:p xmlns:a="http://schemas.openxmlformats.org/drawingml/2006/main">
             <a:pPr>
+              <a:buNone/>
               <a:defRPr sz="1350" b="1">
                 <a:solidFill>
                   <a:srgbClr val="263C3A"/>
@@ -3386,7 +3559,7 @@
           <p:cNvPr id="14" name="">
             <a:extLst xmlns:a="http://schemas.openxmlformats.org/drawingml/2006/main">
               <a:ext uri="{FF2B5EF4-FFF2-40B4-BE49-F238E27FC236}">
-                <a16:creationId xmlns:a16="http://schemas.microsoft.com/office/drawing/2014/main" id="{539E279A-49CC-4311-B7D9-52FD7A734018}"/>
+                <a16:creationId xmlns:a16="http://schemas.microsoft.com/office/drawing/2014/main" id="{A7E15FE3-6422-46FB-AFC4-887546C7840F}"/>
               </a:ext>
             </a:extLst>
           </p:cNvPr>
@@ -3415,6 +3588,7 @@
           <a:lstStyle xmlns:a="http://schemas.openxmlformats.org/drawingml/2006/main"/>
           <a:p xmlns:a="http://schemas.openxmlformats.org/drawingml/2006/main">
             <a:pPr>
+              <a:buNone/>
               <a:defRPr sz="1725" b="1">
                 <a:solidFill>
                   <a:srgbClr val="263C3A"/>
@@ -3443,7 +3617,7 @@
           <p:cNvPr id="15" name="">
             <a:extLst xmlns:a="http://schemas.openxmlformats.org/drawingml/2006/main">
               <a:ext uri="{FF2B5EF4-FFF2-40B4-BE49-F238E27FC236}">
-                <a16:creationId xmlns:a16="http://schemas.microsoft.com/office/drawing/2014/main" id="{8C9DD569-E507-461E-9ABF-530DD916BC70}"/>
+                <a16:creationId xmlns:a16="http://schemas.microsoft.com/office/drawing/2014/main" id="{4E8A2E18-2F48-4EBA-A011-64809143BCD5}"/>
               </a:ext>
             </a:extLst>
           </p:cNvPr>
@@ -3472,6 +3646,7 @@
           <a:lstStyle xmlns:a="http://schemas.openxmlformats.org/drawingml/2006/main"/>
           <a:p xmlns:a="http://schemas.openxmlformats.org/drawingml/2006/main">
             <a:pPr>
+              <a:buNone/>
               <a:defRPr sz="1950" b="0">
                 <a:solidFill>
                   <a:srgbClr val="687572"/>
@@ -3500,7 +3675,7 @@
           <p:cNvPr id="16" name="">
             <a:extLst xmlns:a="http://schemas.openxmlformats.org/drawingml/2006/main">
               <a:ext uri="{FF2B5EF4-FFF2-40B4-BE49-F238E27FC236}">
-                <a16:creationId xmlns:a16="http://schemas.microsoft.com/office/drawing/2014/main" id="{DDCBE989-BDE4-4625-B147-E0A072FF4C6A}"/>
+                <a16:creationId xmlns:a16="http://schemas.microsoft.com/office/drawing/2014/main" id="{1F20F1AB-AF23-4FBF-A30F-C79FAFE06FD5}"/>
               </a:ext>
             </a:extLst>
           </p:cNvPr>
@@ -3532,7 +3707,7 @@
           <p:cNvPr id="17" name="">
             <a:extLst xmlns:a="http://schemas.openxmlformats.org/drawingml/2006/main">
               <a:ext uri="{FF2B5EF4-FFF2-40B4-BE49-F238E27FC236}">
-                <a16:creationId xmlns:a16="http://schemas.microsoft.com/office/drawing/2014/main" id="{A1992BD2-E64D-489A-A6B6-F50504A2F1B0}"/>
+                <a16:creationId xmlns:a16="http://schemas.microsoft.com/office/drawing/2014/main" id="{AA95D6CD-2081-4A34-BF91-8D0C581B3FB9}"/>
               </a:ext>
             </a:extLst>
           </p:cNvPr>
@@ -3562,7 +3737,7 @@
           <p:cNvPr id="18" name="">
             <a:extLst xmlns:a="http://schemas.openxmlformats.org/drawingml/2006/main">
               <a:ext uri="{FF2B5EF4-FFF2-40B4-BE49-F238E27FC236}">
-                <a16:creationId xmlns:a16="http://schemas.microsoft.com/office/drawing/2014/main" id="{9454E637-4742-4638-820C-A2EBA1E78918}"/>
+                <a16:creationId xmlns:a16="http://schemas.microsoft.com/office/drawing/2014/main" id="{BB8528A2-DC0E-4DD6-B435-3F09D02C94A1}"/>
               </a:ext>
             </a:extLst>
           </p:cNvPr>
@@ -3591,6 +3766,7 @@
           <a:lstStyle xmlns:a="http://schemas.openxmlformats.org/drawingml/2006/main"/>
           <a:p xmlns:a="http://schemas.openxmlformats.org/drawingml/2006/main">
             <a:pPr>
+              <a:buNone/>
               <a:defRPr sz="1350" b="1">
                 <a:solidFill>
                   <a:srgbClr val="263C3A"/>
@@ -3619,7 +3795,7 @@
           <p:cNvPr id="19" name="">
             <a:extLst xmlns:a="http://schemas.openxmlformats.org/drawingml/2006/main">
               <a:ext uri="{FF2B5EF4-FFF2-40B4-BE49-F238E27FC236}">
-                <a16:creationId xmlns:a16="http://schemas.microsoft.com/office/drawing/2014/main" id="{4BB15420-C009-4E7D-8858-0C3A878AB42C}"/>
+                <a16:creationId xmlns:a16="http://schemas.microsoft.com/office/drawing/2014/main" id="{602F0665-A1AB-4F65-89CE-D6C2B6C6BB72}"/>
               </a:ext>
             </a:extLst>
           </p:cNvPr>
@@ -3648,6 +3824,7 @@
           <a:lstStyle xmlns:a="http://schemas.openxmlformats.org/drawingml/2006/main"/>
           <a:p xmlns:a="http://schemas.openxmlformats.org/drawingml/2006/main">
             <a:pPr>
+              <a:buNone/>
               <a:defRPr sz="1725" b="1">
                 <a:solidFill>
                   <a:srgbClr val="263C3A"/>
@@ -3676,7 +3853,7 @@
           <p:cNvPr id="20" name="">
             <a:extLst xmlns:a="http://schemas.openxmlformats.org/drawingml/2006/main">
               <a:ext uri="{FF2B5EF4-FFF2-40B4-BE49-F238E27FC236}">
-                <a16:creationId xmlns:a16="http://schemas.microsoft.com/office/drawing/2014/main" id="{5328C07E-93BA-4763-B61D-EA11F112A765}"/>
+                <a16:creationId xmlns:a16="http://schemas.microsoft.com/office/drawing/2014/main" id="{82E34D48-787D-47DE-B132-B836E2CA8580}"/>
               </a:ext>
             </a:extLst>
           </p:cNvPr>
@@ -3705,6 +3882,7 @@
           <a:lstStyle xmlns:a="http://schemas.openxmlformats.org/drawingml/2006/main"/>
           <a:p xmlns:a="http://schemas.openxmlformats.org/drawingml/2006/main">
             <a:pPr>
+              <a:buNone/>
               <a:defRPr sz="1950" b="0">
                 <a:solidFill>
                   <a:srgbClr val="687572"/>
@@ -3733,7 +3911,7 @@
           <p:cNvPr id="21" name="">
             <a:extLst xmlns:a="http://schemas.openxmlformats.org/drawingml/2006/main">
               <a:ext uri="{FF2B5EF4-FFF2-40B4-BE49-F238E27FC236}">
-                <a16:creationId xmlns:a16="http://schemas.microsoft.com/office/drawing/2014/main" id="{F22BFD62-4A57-4B3A-AFF7-9A73F806BA8D}"/>
+                <a16:creationId xmlns:a16="http://schemas.microsoft.com/office/drawing/2014/main" id="{35D8FEDF-DE0E-4157-8294-094DBC1ED3C5}"/>
               </a:ext>
             </a:extLst>
           </p:cNvPr>
@@ -3765,7 +3943,7 @@
           <p:cNvPr id="22" name="">
             <a:extLst xmlns:a="http://schemas.openxmlformats.org/drawingml/2006/main">
               <a:ext uri="{FF2B5EF4-FFF2-40B4-BE49-F238E27FC236}">
-                <a16:creationId xmlns:a16="http://schemas.microsoft.com/office/drawing/2014/main" id="{E3735FEB-4433-4177-909B-FA27C2C342D4}"/>
+                <a16:creationId xmlns:a16="http://schemas.microsoft.com/office/drawing/2014/main" id="{050922B8-98B9-401C-8A28-125301F72EAC}"/>
               </a:ext>
             </a:extLst>
           </p:cNvPr>
@@ -3795,7 +3973,7 @@
           <p:cNvPr id="23" name="">
             <a:extLst xmlns:a="http://schemas.openxmlformats.org/drawingml/2006/main">
               <a:ext uri="{FF2B5EF4-FFF2-40B4-BE49-F238E27FC236}">
-                <a16:creationId xmlns:a16="http://schemas.microsoft.com/office/drawing/2014/main" id="{8DE5A9A9-B99D-46E6-8FFE-7D26D2A333F5}"/>
+                <a16:creationId xmlns:a16="http://schemas.microsoft.com/office/drawing/2014/main" id="{96DA577E-9B82-4BA0-8567-866547B47EE1}"/>
               </a:ext>
             </a:extLst>
           </p:cNvPr>
@@ -3824,6 +4002,7 @@
           <a:lstStyle xmlns:a="http://schemas.openxmlformats.org/drawingml/2006/main"/>
           <a:p xmlns:a="http://schemas.openxmlformats.org/drawingml/2006/main">
             <a:pPr>
+              <a:buNone/>
               <a:defRPr sz="1350" b="1">
                 <a:solidFill>
                   <a:srgbClr val="263C3A"/>
@@ -3852,7 +4031,7 @@
           <p:cNvPr id="24" name="">
             <a:extLst xmlns:a="http://schemas.openxmlformats.org/drawingml/2006/main">
               <a:ext uri="{FF2B5EF4-FFF2-40B4-BE49-F238E27FC236}">
-                <a16:creationId xmlns:a16="http://schemas.microsoft.com/office/drawing/2014/main" id="{2B534FA5-A429-455F-86A1-26FD01FBBCB0}"/>
+                <a16:creationId xmlns:a16="http://schemas.microsoft.com/office/drawing/2014/main" id="{51F687E0-662E-456A-8422-0A727E438AEE}"/>
               </a:ext>
             </a:extLst>
           </p:cNvPr>
@@ -3881,6 +4060,7 @@
           <a:lstStyle xmlns:a="http://schemas.openxmlformats.org/drawingml/2006/main"/>
           <a:p xmlns:a="http://schemas.openxmlformats.org/drawingml/2006/main">
             <a:pPr>
+              <a:buNone/>
               <a:defRPr sz="1725" b="1">
                 <a:solidFill>
                   <a:srgbClr val="263C3A"/>
@@ -3909,7 +4089,7 @@
           <p:cNvPr id="25" name="">
             <a:extLst xmlns:a="http://schemas.openxmlformats.org/drawingml/2006/main">
               <a:ext uri="{FF2B5EF4-FFF2-40B4-BE49-F238E27FC236}">
-                <a16:creationId xmlns:a16="http://schemas.microsoft.com/office/drawing/2014/main" id="{86F0E46E-BC56-4036-B275-492CF84D54E0}"/>
+                <a16:creationId xmlns:a16="http://schemas.microsoft.com/office/drawing/2014/main" id="{8CFBC060-861B-42D4-9F99-20D074BF9998}"/>
               </a:ext>
             </a:extLst>
           </p:cNvPr>
@@ -3938,6 +4118,7 @@
           <a:lstStyle xmlns:a="http://schemas.openxmlformats.org/drawingml/2006/main"/>
           <a:p xmlns:a="http://schemas.openxmlformats.org/drawingml/2006/main">
             <a:pPr>
+              <a:buNone/>
               <a:defRPr sz="1950" b="0">
                 <a:solidFill>
                   <a:srgbClr val="687572"/>
@@ -3966,7 +4147,7 @@
           <p:cNvPr id="26" name="">
             <a:extLst xmlns:a="http://schemas.openxmlformats.org/drawingml/2006/main">
               <a:ext uri="{FF2B5EF4-FFF2-40B4-BE49-F238E27FC236}">
-                <a16:creationId xmlns:a16="http://schemas.microsoft.com/office/drawing/2014/main" id="{9D8413FF-3E9C-4A7D-8B51-3693B9390AC6}"/>
+                <a16:creationId xmlns:a16="http://schemas.microsoft.com/office/drawing/2014/main" id="{E1B6691A-AAB8-4C37-A638-3A231631C889}"/>
               </a:ext>
             </a:extLst>
           </p:cNvPr>
@@ -3996,7 +4177,7 @@
           <p:cNvPr id="27" name="">
             <a:extLst xmlns:a="http://schemas.openxmlformats.org/drawingml/2006/main">
               <a:ext uri="{FF2B5EF4-FFF2-40B4-BE49-F238E27FC236}">
-                <a16:creationId xmlns:a16="http://schemas.microsoft.com/office/drawing/2014/main" id="{F15623B8-71DB-4AB1-A55D-A4C202AAEB2A}"/>
+                <a16:creationId xmlns:a16="http://schemas.microsoft.com/office/drawing/2014/main" id="{36D544D6-B109-4EB0-8F15-D6080B838C5B}"/>
               </a:ext>
             </a:extLst>
           </p:cNvPr>
@@ -4025,6 +4206,7 @@
           <a:lstStyle xmlns:a="http://schemas.openxmlformats.org/drawingml/2006/main"/>
           <a:p xmlns:a="http://schemas.openxmlformats.org/drawingml/2006/main">
             <a:pPr>
+              <a:buNone/>
               <a:defRPr sz="1575" b="0">
                 <a:solidFill>
                   <a:srgbClr val="263C3A"/>
@@ -4053,7 +4235,7 @@
           <p:cNvPr id="28" name="">
             <a:extLst xmlns:a="http://schemas.openxmlformats.org/drawingml/2006/main">
               <a:ext uri="{FF2B5EF4-FFF2-40B4-BE49-F238E27FC236}">
-                <a16:creationId xmlns:a16="http://schemas.microsoft.com/office/drawing/2014/main" id="{4169B64E-593A-4A34-8DFA-B7E3A59B246E}"/>
+                <a16:creationId xmlns:a16="http://schemas.microsoft.com/office/drawing/2014/main" id="{A5ED43A7-4488-4D2A-99F3-A8CD9D67DC3B}"/>
               </a:ext>
             </a:extLst>
           </p:cNvPr>
@@ -4083,7 +4265,7 @@
           <p:cNvPr id="29" name="">
             <a:extLst xmlns:a="http://schemas.openxmlformats.org/drawingml/2006/main">
               <a:ext uri="{FF2B5EF4-FFF2-40B4-BE49-F238E27FC236}">
-                <a16:creationId xmlns:a16="http://schemas.microsoft.com/office/drawing/2014/main" id="{5EB8139E-B332-4CFB-B3B6-1F387BA35DD2}"/>
+                <a16:creationId xmlns:a16="http://schemas.microsoft.com/office/drawing/2014/main" id="{DE7932AE-C04E-4977-9D46-5B1F7645855A}"/>
               </a:ext>
             </a:extLst>
           </p:cNvPr>
@@ -4112,6 +4294,7 @@
           <a:lstStyle xmlns:a="http://schemas.openxmlformats.org/drawingml/2006/main"/>
           <a:p xmlns:a="http://schemas.openxmlformats.org/drawingml/2006/main">
             <a:pPr>
+              <a:buNone/>
               <a:defRPr sz="1650" b="0">
                 <a:solidFill>
                   <a:srgbClr val="687572"/>
@@ -4140,7 +4323,7 @@
           <p:cNvPr id="30" name="">
             <a:extLst xmlns:a="http://schemas.openxmlformats.org/drawingml/2006/main">
               <a:ext uri="{FF2B5EF4-FFF2-40B4-BE49-F238E27FC236}">
-                <a16:creationId xmlns:a16="http://schemas.microsoft.com/office/drawing/2014/main" id="{BDDFAFAC-8437-4EAC-9912-395F293365BE}"/>
+                <a16:creationId xmlns:a16="http://schemas.microsoft.com/office/drawing/2014/main" id="{7841E92F-1EFB-47D6-978E-AD0D81E14E93}"/>
               </a:ext>
             </a:extLst>
           </p:cNvPr>
@@ -4169,6 +4352,7 @@
           <a:lstStyle xmlns:a="http://schemas.openxmlformats.org/drawingml/2006/main"/>
           <a:p xmlns:a="http://schemas.openxmlformats.org/drawingml/2006/main">
             <a:pPr>
+              <a:buNone/>
               <a:defRPr sz="1650" b="0">
                 <a:solidFill>
                   <a:srgbClr val="687572"/>
@@ -4192,10 +4376,79 @@
           </a:p>
         </p:txBody>
       </p:sp>
+      <p:sp>
+        <p:nvSpPr>
+          <p:cNvPr id="32" name="source-credit">
+            <a:extLst xmlns:a="http://schemas.openxmlformats.org/drawingml/2006/main">
+              <a:ext uri="{FF2B5EF4-FFF2-40B4-BE49-F238E27FC236}">
+                <a16:creationId xmlns:a16="http://schemas.microsoft.com/office/drawing/2014/main" id="{F8CA5BBF-6473-49FD-8567-6F7333F0197B}"/>
+              </a:ext>
+            </a:extLst>
+          </p:cNvPr>
+          <p:cNvSpPr>
+            <a:spLocks xmlns:a="http://schemas.openxmlformats.org/drawingml/2006/main" noGrp="1"/>
+          </p:cNvSpPr>
+          <p:nvPr/>
+        </p:nvSpPr>
+        <p:spPr>
+          <a:xfrm xmlns:a="http://schemas.openxmlformats.org/drawingml/2006/main">
+            <a:off x="609600" y="6591300"/>
+            <a:ext cx="10972800" cy="190500"/>
+          </a:xfrm>
+          <a:prstGeom xmlns:a="http://schemas.openxmlformats.org/drawingml/2006/main" prst="rect">
+            <a:avLst/>
+          </a:prstGeom>
+          <a:noFill xmlns:a="http://schemas.openxmlformats.org/drawingml/2006/main"/>
+          <a:ln xmlns:a="http://schemas.openxmlformats.org/drawingml/2006/main" w="0">
+            <a:noFill/>
+          </a:ln>
+        </p:spPr>
+        <p:txBody>
+          <a:bodyPr xmlns:a="http://schemas.openxmlformats.org/drawingml/2006/main" wrap="none" lIns="0" tIns="0" rIns="0" bIns="0" anchor="t">
+            <a:noAutofit/>
+          </a:bodyPr>
+          <a:lstStyle xmlns:a="http://schemas.openxmlformats.org/drawingml/2006/main"/>
+          <a:p xmlns:a="http://schemas.openxmlformats.org/drawingml/2006/main">
+            <a:pPr>
+              <a:defRPr sz="900">
+                <a:solidFill>
+                  <a:srgbClr val="687572"/>
+                </a:solidFill>
+                <a:latin typeface="DejaVu Sans"/>
+                <a:ea typeface="DejaVu Sans"/>
+                <a:cs typeface="DejaVu Sans"/>
+              </a:defRPr>
+            </a:pPr>
+            <a:r>
+              <a:rPr sz="900">
+                <a:solidFill>
+                  <a:srgbClr val="687572"/>
+                </a:solidFill>
+                <a:latin typeface="DejaVu Sans"/>
+                <a:ea typeface="DejaVu Sans"/>
+                <a:cs typeface="DejaVu Sans"/>
+              </a:rPr>
+              <a:t>Source: </a:t>
+            </a:r>
+            <a:r>
+              <a:rPr sz="900">
+                <a:solidFill>
+                  <a:srgbClr val="687572"/>
+                </a:solidFill>
+                <a:latin typeface="DejaVu Sans"/>
+                <a:ea typeface="DejaVu Sans"/>
+                <a:cs typeface="DejaVu Sans"/>
+                <a:hlinkClick xmlns:r="http://schemas.openxmlformats.org/officeDocument/2006/relationships" r:id="R9bb4e84fa71643dd"/>
+              </a:rPr>
+              <a:t>Shared placemat structure; TNT retrieval adaptation — original guidance</a:t>
+            </a:r>
+          </a:p>
+        </p:txBody>
+      </p:sp>
     </p:spTree>
     <p:extLst>
       <p:ext uri="{BB962C8B-B14F-4D97-AF65-F5344CB8AC3E}">
-        <p14:creationId xmlns:p14="http://schemas.microsoft.com/office/powerpoint/2010/main" val="1931742489"/>
+        <p14:creationId xmlns:p14="http://schemas.microsoft.com/office/powerpoint/2010/main" val="1854463289"/>
       </p:ext>
     </p:extLst>
   </p:cSld>
